--- a/exports/pptx/lessons/primary-module-09-subtraction-nikhilam/day-04-hundred-minus-friends.pptx
+++ b/exports/pptx/lessons/primary-module-09-subtraction-nikhilam/day-04-hundred-minus-friends.pptx
@@ -3594,7 +3594,333 @@
         </p:nvSpPr>
         <p:spPr>
           <a:xfrm>
-            <a:off x="406301" y="4919514"/>
+            <a:off x="406301" y="3319909"/>
+            <a:ext cx="8498026" cy="213271"/>
+          </a:xfrm>
+          <a:prstGeom prst="rect">
+            <a:avLst/>
+          </a:prstGeom>
+          <a:noFill/>
+          <a:ln/>
+        </p:spPr>
+        <p:txBody>
+          <a:bodyPr wrap="square" lIns="0" tIns="0" rIns="0" bIns="0" rtlCol="0" anchor="t"/>
+          <a:lstStyle/>
+          <a:p>
+            <a:pPr algn="l" indent="0" marL="0">
+              <a:lnSpc>
+                <a:spcPts val="1680"/>
+              </a:lnSpc>
+              <a:spcBef>
+                <a:spcPts val="300"/>
+              </a:spcBef>
+              <a:spcAft>
+                <a:spcPts val="300"/>
+              </a:spcAft>
+              <a:buNone/>
+            </a:pPr>
+            <a:r>
+              <a:rPr lang="en-US" sz="1200" i="1" dirty="0">
+                <a:solidFill>
+                  <a:srgbClr val="2C2C2C"/>
+                </a:solidFill>
+                <a:latin typeface="Verdana" pitchFamily="34" charset="0"/>
+                <a:ea typeface="Verdana" pitchFamily="34" charset="-122"/>
+                <a:cs typeface="Verdana" pitchFamily="34" charset="-120"/>
+              </a:rPr>
+              <a:t>Each row: Problem · Friend of N · 9 in front · Answer.</a:t>
+            </a:r>
+            <a:endParaRPr lang="en-US" sz="1200" dirty="0"/>
+          </a:p>
+        </p:txBody>
+      </p:sp>
+      <p:sp>
+        <p:nvSpPr>
+          <p:cNvPr id="14" name="Text 12"/>
+          <p:cNvSpPr/>
+          <p:nvPr/>
+        </p:nvSpPr>
+        <p:spPr>
+          <a:xfrm>
+            <a:off x="634901" y="3622030"/>
+            <a:ext cx="8102798" cy="1013222"/>
+          </a:xfrm>
+          <a:prstGeom prst="rect">
+            <a:avLst/>
+          </a:prstGeom>
+          <a:noFill/>
+          <a:ln/>
+        </p:spPr>
+        <p:txBody>
+          <a:bodyPr wrap="square" lIns="0" tIns="0" rIns="0" bIns="0" rtlCol="0" anchor="t"/>
+          <a:lstStyle/>
+          <a:p>
+            <a:pPr algn="l" marL="342900" indent="-342900">
+              <a:lnSpc>
+                <a:spcPts val="1620"/>
+              </a:lnSpc>
+              <a:spcAft>
+                <a:spcPts val="300"/>
+              </a:spcAft>
+              <a:buSzPct val="100000"/>
+              <a:buChar char="•"/>
+            </a:pPr>
+            <a:r>
+              <a:rPr lang="en-US" sz="1200" b="1" dirty="0">
+                <a:solidFill>
+                  <a:srgbClr val="2C2C2C"/>
+                </a:solidFill>
+                <a:latin typeface="Verdana" pitchFamily="34" charset="0"/>
+                <a:ea typeface="Verdana" pitchFamily="34" charset="-122"/>
+                <a:cs typeface="Verdana" pitchFamily="34" charset="-120"/>
+              </a:rPr>
+              <a:t>100 − 4</a:t>
+            </a:r>
+            <a:pPr algn="l" indent="0" marL="0">
+              <a:lnSpc>
+                <a:spcPts val="1620"/>
+              </a:lnSpc>
+              <a:spcAft>
+                <a:spcPts val="300"/>
+              </a:spcAft>
+              <a:buNone/>
+            </a:pPr>
+            <a:r>
+              <a:rPr lang="en-US" sz="1200" dirty="0">
+                <a:solidFill>
+                  <a:srgbClr val="2C2C2C"/>
+                </a:solidFill>
+                <a:latin typeface="Verdana" pitchFamily="34" charset="0"/>
+                <a:ea typeface="Verdana" pitchFamily="34" charset="-122"/>
+                <a:cs typeface="Verdana" pitchFamily="34" charset="-120"/>
+              </a:rPr>
+              <a:t> — 6 · 9 · </a:t>
+            </a:r>
+            <a:pPr algn="l" indent="0" marL="0">
+              <a:lnSpc>
+                <a:spcPts val="1620"/>
+              </a:lnSpc>
+              <a:spcAft>
+                <a:spcPts val="300"/>
+              </a:spcAft>
+              <a:buNone/>
+            </a:pPr>
+            <a:r>
+              <a:rPr lang="en-US" sz="1200" b="1" dirty="0">
+                <a:solidFill>
+                  <a:srgbClr val="2C2C2C"/>
+                </a:solidFill>
+                <a:latin typeface="Verdana" pitchFamily="34" charset="0"/>
+                <a:ea typeface="Verdana" pitchFamily="34" charset="-122"/>
+                <a:cs typeface="Verdana" pitchFamily="34" charset="-120"/>
+              </a:rPr>
+              <a:t>96</a:t>
+            </a:r>
+            <a:endParaRPr lang="en-US" sz="1200" dirty="0"/>
+          </a:p>
+          <a:p>
+            <a:pPr algn="l" marL="342900" indent="-342900">
+              <a:lnSpc>
+                <a:spcPts val="1620"/>
+              </a:lnSpc>
+              <a:spcAft>
+                <a:spcPts val="300"/>
+              </a:spcAft>
+              <a:buSzPct val="100000"/>
+              <a:buChar char="•"/>
+            </a:pPr>
+            <a:r>
+              <a:rPr lang="en-US" sz="1200" b="1" dirty="0">
+                <a:solidFill>
+                  <a:srgbClr val="2C2C2C"/>
+                </a:solidFill>
+                <a:latin typeface="Verdana" pitchFamily="34" charset="0"/>
+                <a:ea typeface="Verdana" pitchFamily="34" charset="-122"/>
+                <a:cs typeface="Verdana" pitchFamily="34" charset="-120"/>
+              </a:rPr>
+              <a:t>100 − 8</a:t>
+            </a:r>
+            <a:pPr algn="l" indent="0" marL="0">
+              <a:lnSpc>
+                <a:spcPts val="1620"/>
+              </a:lnSpc>
+              <a:spcAft>
+                <a:spcPts val="300"/>
+              </a:spcAft>
+              <a:buNone/>
+            </a:pPr>
+            <a:r>
+              <a:rPr lang="en-US" sz="1200" dirty="0">
+                <a:solidFill>
+                  <a:srgbClr val="2C2C2C"/>
+                </a:solidFill>
+                <a:latin typeface="Verdana" pitchFamily="34" charset="0"/>
+                <a:ea typeface="Verdana" pitchFamily="34" charset="-122"/>
+                <a:cs typeface="Verdana" pitchFamily="34" charset="-120"/>
+              </a:rPr>
+              <a:t> — 2 · 9 · </a:t>
+            </a:r>
+            <a:pPr algn="l" indent="0" marL="0">
+              <a:lnSpc>
+                <a:spcPts val="1620"/>
+              </a:lnSpc>
+              <a:spcAft>
+                <a:spcPts val="300"/>
+              </a:spcAft>
+              <a:buNone/>
+            </a:pPr>
+            <a:r>
+              <a:rPr lang="en-US" sz="1200" b="1" dirty="0">
+                <a:solidFill>
+                  <a:srgbClr val="2C2C2C"/>
+                </a:solidFill>
+                <a:latin typeface="Verdana" pitchFamily="34" charset="0"/>
+                <a:ea typeface="Verdana" pitchFamily="34" charset="-122"/>
+                <a:cs typeface="Verdana" pitchFamily="34" charset="-120"/>
+              </a:rPr>
+              <a:t>92</a:t>
+            </a:r>
+            <a:endParaRPr lang="en-US" sz="1200" dirty="0"/>
+          </a:p>
+          <a:p>
+            <a:pPr algn="l" marL="342900" indent="-342900">
+              <a:lnSpc>
+                <a:spcPts val="1620"/>
+              </a:lnSpc>
+              <a:spcAft>
+                <a:spcPts val="300"/>
+              </a:spcAft>
+              <a:buSzPct val="100000"/>
+              <a:buChar char="•"/>
+            </a:pPr>
+            <a:r>
+              <a:rPr lang="en-US" sz="1200" b="1" dirty="0">
+                <a:solidFill>
+                  <a:srgbClr val="2C2C2C"/>
+                </a:solidFill>
+                <a:latin typeface="Verdana" pitchFamily="34" charset="0"/>
+                <a:ea typeface="Verdana" pitchFamily="34" charset="-122"/>
+                <a:cs typeface="Verdana" pitchFamily="34" charset="-120"/>
+              </a:rPr>
+              <a:t>100 − 1</a:t>
+            </a:r>
+            <a:pPr algn="l" indent="0" marL="0">
+              <a:lnSpc>
+                <a:spcPts val="1620"/>
+              </a:lnSpc>
+              <a:spcAft>
+                <a:spcPts val="300"/>
+              </a:spcAft>
+              <a:buNone/>
+            </a:pPr>
+            <a:r>
+              <a:rPr lang="en-US" sz="1200" dirty="0">
+                <a:solidFill>
+                  <a:srgbClr val="2C2C2C"/>
+                </a:solidFill>
+                <a:latin typeface="Verdana" pitchFamily="34" charset="0"/>
+                <a:ea typeface="Verdana" pitchFamily="34" charset="-122"/>
+                <a:cs typeface="Verdana" pitchFamily="34" charset="-120"/>
+              </a:rPr>
+              <a:t> — 9 · 9 · </a:t>
+            </a:r>
+            <a:pPr algn="l" indent="0" marL="0">
+              <a:lnSpc>
+                <a:spcPts val="1620"/>
+              </a:lnSpc>
+              <a:spcAft>
+                <a:spcPts val="300"/>
+              </a:spcAft>
+              <a:buNone/>
+            </a:pPr>
+            <a:r>
+              <a:rPr lang="en-US" sz="1200" b="1" dirty="0">
+                <a:solidFill>
+                  <a:srgbClr val="2C2C2C"/>
+                </a:solidFill>
+                <a:latin typeface="Verdana" pitchFamily="34" charset="0"/>
+                <a:ea typeface="Verdana" pitchFamily="34" charset="-122"/>
+                <a:cs typeface="Verdana" pitchFamily="34" charset="-120"/>
+              </a:rPr>
+              <a:t>99</a:t>
+            </a:r>
+            <a:endParaRPr lang="en-US" sz="1200" dirty="0"/>
+          </a:p>
+          <a:p>
+            <a:pPr algn="l" marL="342900" indent="-342900">
+              <a:lnSpc>
+                <a:spcPts val="1620"/>
+              </a:lnSpc>
+              <a:spcAft>
+                <a:spcPts val="300"/>
+              </a:spcAft>
+              <a:buSzPct val="100000"/>
+              <a:buChar char="•"/>
+            </a:pPr>
+            <a:r>
+              <a:rPr lang="en-US" sz="1200" b="1" dirty="0">
+                <a:solidFill>
+                  <a:srgbClr val="2C2C2C"/>
+                </a:solidFill>
+                <a:latin typeface="Verdana" pitchFamily="34" charset="0"/>
+                <a:ea typeface="Verdana" pitchFamily="34" charset="-122"/>
+                <a:cs typeface="Verdana" pitchFamily="34" charset="-120"/>
+              </a:rPr>
+              <a:t>100 − 9</a:t>
+            </a:r>
+            <a:pPr algn="l" indent="0" marL="0">
+              <a:lnSpc>
+                <a:spcPts val="1620"/>
+              </a:lnSpc>
+              <a:spcAft>
+                <a:spcPts val="300"/>
+              </a:spcAft>
+              <a:buNone/>
+            </a:pPr>
+            <a:r>
+              <a:rPr lang="en-US" sz="1200" dirty="0">
+                <a:solidFill>
+                  <a:srgbClr val="2C2C2C"/>
+                </a:solidFill>
+                <a:latin typeface="Verdana" pitchFamily="34" charset="0"/>
+                <a:ea typeface="Verdana" pitchFamily="34" charset="-122"/>
+                <a:cs typeface="Verdana" pitchFamily="34" charset="-120"/>
+              </a:rPr>
+              <a:t> — 1 · 9 · </a:t>
+            </a:r>
+            <a:pPr algn="l" indent="0" marL="0">
+              <a:lnSpc>
+                <a:spcPts val="1620"/>
+              </a:lnSpc>
+              <a:spcAft>
+                <a:spcPts val="300"/>
+              </a:spcAft>
+              <a:buNone/>
+            </a:pPr>
+            <a:r>
+              <a:rPr lang="en-US" sz="1200" b="1" dirty="0">
+                <a:solidFill>
+                  <a:srgbClr val="2C2C2C"/>
+                </a:solidFill>
+                <a:latin typeface="Verdana" pitchFamily="34" charset="0"/>
+                <a:ea typeface="Verdana" pitchFamily="34" charset="-122"/>
+                <a:cs typeface="Verdana" pitchFamily="34" charset="-120"/>
+              </a:rPr>
+              <a:t>91</a:t>
+            </a:r>
+            <a:endParaRPr lang="en-US" sz="1200" dirty="0"/>
+          </a:p>
+        </p:txBody>
+      </p:sp>
+      <p:sp>
+        <p:nvSpPr>
+          <p:cNvPr id="15" name="Text 13"/>
+          <p:cNvSpPr/>
+          <p:nvPr/>
+        </p:nvSpPr>
+        <p:spPr>
+          <a:xfrm>
+            <a:off x="406301" y="4800302"/>
             <a:ext cx="8498026" cy="213271"/>
           </a:xfrm>
           <a:prstGeom prst="rect">

--- a/exports/pptx/lessons/primary-module-09-subtraction-nikhilam/day-04-hundred-minus-friends.pptx
+++ b/exports/pptx/lessons/primary-module-09-subtraction-nikhilam/day-04-hundred-minus-friends.pptx
@@ -15,9 +15,13 @@
     <p:sldId id="263" r:id="rId9"/>
     <p:sldId id="264" r:id="rId10"/>
     <p:sldId id="265" r:id="rId11"/>
+    <p:sldId id="266" r:id="rId12"/>
+    <p:sldId id="267" r:id="rId13"/>
+    <p:sldId id="268" r:id="rId14"/>
+    <p:sldId id="269" r:id="rId15"/>
   </p:sldIdLst>
   <p:notesMasterIdLst>
-    <p:notesMasterId r:id="rId12"/>
+    <p:notesMasterId r:id="rId16"/>
   </p:notesMasterIdLst>
   <p:sldSz cx="9144000" cy="5143500"/>
   <p:notesSz cx="5143500" cy="9144000"/>
@@ -623,6 +627,358 @@
             <a:fld id="{F7021451-1387-4CA6-816F-3879F97B5CBC}" type="slidenum">
               <a:rPr lang="en-US"/>
               <a:t>10</a:t>
+            </a:fld>
+            <a:endParaRPr lang="en-US"/>
+          </a:p>
+        </p:txBody>
+      </p:sp>
+    </p:spTree>
+    <p:extLst>
+      <p:ext uri="{BB962C8B-B14F-4D97-AF65-F5344CB8AC3E}">
+        <p14:creationId xmlns:p14="http://schemas.microsoft.com/office/powerpoint/2010/main" val="1024086991"/>
+      </p:ext>
+    </p:extLst>
+  </p:cSld>
+  <p:clrMapOvr>
+    <a:masterClrMapping/>
+  </p:clrMapOvr>
+</p:notes>
+</file>
+
+<file path=ppt/notesSlides/notesSlide11.xml><?xml version="1.0" encoding="utf-8"?>
+<p:notes xmlns:a="http://schemas.openxmlformats.org/drawingml/2006/main" xmlns:r="http://schemas.openxmlformats.org/officeDocument/2006/relationships" xmlns:p="http://schemas.openxmlformats.org/presentationml/2006/main">
+  <p:cSld>
+    <p:spTree>
+      <p:nvGrpSpPr>
+        <p:cNvPr id="1" name=""/>
+        <p:cNvGrpSpPr/>
+        <p:nvPr/>
+      </p:nvGrpSpPr>
+      <p:grpSpPr>
+        <a:xfrm>
+          <a:off x="0" y="0"/>
+          <a:ext cx="0" cy="0"/>
+          <a:chOff x="0" y="0"/>
+          <a:chExt cx="0" cy="0"/>
+        </a:xfrm>
+      </p:grpSpPr>
+      <p:sp>
+        <p:nvSpPr>
+          <p:cNvPr id="2" name="Slide Image Placeholder 1"/>
+          <p:cNvSpPr>
+            <a:spLocks noGrp="1" noRot="1" noChangeAspect="1"/>
+          </p:cNvSpPr>
+          <p:nvPr>
+            <p:ph type="sldImg"/>
+          </p:nvPr>
+        </p:nvSpPr>
+        <p:spPr/>
+      </p:sp>
+      <p:sp>
+        <p:nvSpPr>
+          <p:cNvPr id="3" name="Notes Placeholder 2"/>
+          <p:cNvSpPr>
+            <a:spLocks noGrp="1"/>
+          </p:cNvSpPr>
+          <p:nvPr>
+            <p:ph type="body" idx="1"/>
+          </p:nvPr>
+        </p:nvSpPr>
+        <p:spPr/>
+        <p:txBody>
+          <a:bodyPr/>
+          <a:lstStyle/>
+          <a:p>
+            <a:r>
+              <a:rPr lang="en-US" dirty="0"/>
+              <a:t/>
+            </a:r>
+            <a:endParaRPr lang="en-US" dirty="0"/>
+          </a:p>
+        </p:txBody>
+      </p:sp>
+      <p:sp>
+        <p:nvSpPr>
+          <p:cNvPr id="4" name="Slide Number Placeholder 3"/>
+          <p:cNvSpPr>
+            <a:spLocks noGrp="1"/>
+          </p:cNvSpPr>
+          <p:nvPr>
+            <p:ph type="sldNum" sz="quarter" idx="10"/>
+          </p:nvPr>
+        </p:nvSpPr>
+        <p:spPr/>
+        <p:txBody>
+          <a:bodyPr/>
+          <a:lstStyle/>
+          <a:p>
+            <a:fld id="{F7021451-1387-4CA6-816F-3879F97B5CBC}" type="slidenum">
+              <a:rPr lang="en-US"/>
+              <a:t>11</a:t>
+            </a:fld>
+            <a:endParaRPr lang="en-US"/>
+          </a:p>
+        </p:txBody>
+      </p:sp>
+    </p:spTree>
+    <p:extLst>
+      <p:ext uri="{BB962C8B-B14F-4D97-AF65-F5344CB8AC3E}">
+        <p14:creationId xmlns:p14="http://schemas.microsoft.com/office/powerpoint/2010/main" val="1024086991"/>
+      </p:ext>
+    </p:extLst>
+  </p:cSld>
+  <p:clrMapOvr>
+    <a:masterClrMapping/>
+  </p:clrMapOvr>
+</p:notes>
+</file>
+
+<file path=ppt/notesSlides/notesSlide12.xml><?xml version="1.0" encoding="utf-8"?>
+<p:notes xmlns:a="http://schemas.openxmlformats.org/drawingml/2006/main" xmlns:r="http://schemas.openxmlformats.org/officeDocument/2006/relationships" xmlns:p="http://schemas.openxmlformats.org/presentationml/2006/main">
+  <p:cSld>
+    <p:spTree>
+      <p:nvGrpSpPr>
+        <p:cNvPr id="1" name=""/>
+        <p:cNvGrpSpPr/>
+        <p:nvPr/>
+      </p:nvGrpSpPr>
+      <p:grpSpPr>
+        <a:xfrm>
+          <a:off x="0" y="0"/>
+          <a:ext cx="0" cy="0"/>
+          <a:chOff x="0" y="0"/>
+          <a:chExt cx="0" cy="0"/>
+        </a:xfrm>
+      </p:grpSpPr>
+      <p:sp>
+        <p:nvSpPr>
+          <p:cNvPr id="2" name="Slide Image Placeholder 1"/>
+          <p:cNvSpPr>
+            <a:spLocks noGrp="1" noRot="1" noChangeAspect="1"/>
+          </p:cNvSpPr>
+          <p:nvPr>
+            <p:ph type="sldImg"/>
+          </p:nvPr>
+        </p:nvSpPr>
+        <p:spPr/>
+      </p:sp>
+      <p:sp>
+        <p:nvSpPr>
+          <p:cNvPr id="3" name="Notes Placeholder 2"/>
+          <p:cNvSpPr>
+            <a:spLocks noGrp="1"/>
+          </p:cNvSpPr>
+          <p:nvPr>
+            <p:ph type="body" idx="1"/>
+          </p:nvPr>
+        </p:nvSpPr>
+        <p:spPr/>
+        <p:txBody>
+          <a:bodyPr/>
+          <a:lstStyle/>
+          <a:p>
+            <a:r>
+              <a:rPr lang="en-US" dirty="0"/>
+              <a:t/>
+            </a:r>
+            <a:endParaRPr lang="en-US" dirty="0"/>
+          </a:p>
+        </p:txBody>
+      </p:sp>
+      <p:sp>
+        <p:nvSpPr>
+          <p:cNvPr id="4" name="Slide Number Placeholder 3"/>
+          <p:cNvSpPr>
+            <a:spLocks noGrp="1"/>
+          </p:cNvSpPr>
+          <p:nvPr>
+            <p:ph type="sldNum" sz="quarter" idx="10"/>
+          </p:nvPr>
+        </p:nvSpPr>
+        <p:spPr/>
+        <p:txBody>
+          <a:bodyPr/>
+          <a:lstStyle/>
+          <a:p>
+            <a:fld id="{F7021451-1387-4CA6-816F-3879F97B5CBC}" type="slidenum">
+              <a:rPr lang="en-US"/>
+              <a:t>12</a:t>
+            </a:fld>
+            <a:endParaRPr lang="en-US"/>
+          </a:p>
+        </p:txBody>
+      </p:sp>
+    </p:spTree>
+    <p:extLst>
+      <p:ext uri="{BB962C8B-B14F-4D97-AF65-F5344CB8AC3E}">
+        <p14:creationId xmlns:p14="http://schemas.microsoft.com/office/powerpoint/2010/main" val="1024086991"/>
+      </p:ext>
+    </p:extLst>
+  </p:cSld>
+  <p:clrMapOvr>
+    <a:masterClrMapping/>
+  </p:clrMapOvr>
+</p:notes>
+</file>
+
+<file path=ppt/notesSlides/notesSlide13.xml><?xml version="1.0" encoding="utf-8"?>
+<p:notes xmlns:a="http://schemas.openxmlformats.org/drawingml/2006/main" xmlns:r="http://schemas.openxmlformats.org/officeDocument/2006/relationships" xmlns:p="http://schemas.openxmlformats.org/presentationml/2006/main">
+  <p:cSld>
+    <p:spTree>
+      <p:nvGrpSpPr>
+        <p:cNvPr id="1" name=""/>
+        <p:cNvGrpSpPr/>
+        <p:nvPr/>
+      </p:nvGrpSpPr>
+      <p:grpSpPr>
+        <a:xfrm>
+          <a:off x="0" y="0"/>
+          <a:ext cx="0" cy="0"/>
+          <a:chOff x="0" y="0"/>
+          <a:chExt cx="0" cy="0"/>
+        </a:xfrm>
+      </p:grpSpPr>
+      <p:sp>
+        <p:nvSpPr>
+          <p:cNvPr id="2" name="Slide Image Placeholder 1"/>
+          <p:cNvSpPr>
+            <a:spLocks noGrp="1" noRot="1" noChangeAspect="1"/>
+          </p:cNvSpPr>
+          <p:nvPr>
+            <p:ph type="sldImg"/>
+          </p:nvPr>
+        </p:nvSpPr>
+        <p:spPr/>
+      </p:sp>
+      <p:sp>
+        <p:nvSpPr>
+          <p:cNvPr id="3" name="Notes Placeholder 2"/>
+          <p:cNvSpPr>
+            <a:spLocks noGrp="1"/>
+          </p:cNvSpPr>
+          <p:nvPr>
+            <p:ph type="body" idx="1"/>
+          </p:nvPr>
+        </p:nvSpPr>
+        <p:spPr/>
+        <p:txBody>
+          <a:bodyPr/>
+          <a:lstStyle/>
+          <a:p>
+            <a:r>
+              <a:rPr lang="en-US" dirty="0"/>
+              <a:t/>
+            </a:r>
+            <a:endParaRPr lang="en-US" dirty="0"/>
+          </a:p>
+        </p:txBody>
+      </p:sp>
+      <p:sp>
+        <p:nvSpPr>
+          <p:cNvPr id="4" name="Slide Number Placeholder 3"/>
+          <p:cNvSpPr>
+            <a:spLocks noGrp="1"/>
+          </p:cNvSpPr>
+          <p:nvPr>
+            <p:ph type="sldNum" sz="quarter" idx="10"/>
+          </p:nvPr>
+        </p:nvSpPr>
+        <p:spPr/>
+        <p:txBody>
+          <a:bodyPr/>
+          <a:lstStyle/>
+          <a:p>
+            <a:fld id="{F7021451-1387-4CA6-816F-3879F97B5CBC}" type="slidenum">
+              <a:rPr lang="en-US"/>
+              <a:t>13</a:t>
+            </a:fld>
+            <a:endParaRPr lang="en-US"/>
+          </a:p>
+        </p:txBody>
+      </p:sp>
+    </p:spTree>
+    <p:extLst>
+      <p:ext uri="{BB962C8B-B14F-4D97-AF65-F5344CB8AC3E}">
+        <p14:creationId xmlns:p14="http://schemas.microsoft.com/office/powerpoint/2010/main" val="1024086991"/>
+      </p:ext>
+    </p:extLst>
+  </p:cSld>
+  <p:clrMapOvr>
+    <a:masterClrMapping/>
+  </p:clrMapOvr>
+</p:notes>
+</file>
+
+<file path=ppt/notesSlides/notesSlide14.xml><?xml version="1.0" encoding="utf-8"?>
+<p:notes xmlns:a="http://schemas.openxmlformats.org/drawingml/2006/main" xmlns:r="http://schemas.openxmlformats.org/officeDocument/2006/relationships" xmlns:p="http://schemas.openxmlformats.org/presentationml/2006/main">
+  <p:cSld>
+    <p:spTree>
+      <p:nvGrpSpPr>
+        <p:cNvPr id="1" name=""/>
+        <p:cNvGrpSpPr/>
+        <p:nvPr/>
+      </p:nvGrpSpPr>
+      <p:grpSpPr>
+        <a:xfrm>
+          <a:off x="0" y="0"/>
+          <a:ext cx="0" cy="0"/>
+          <a:chOff x="0" y="0"/>
+          <a:chExt cx="0" cy="0"/>
+        </a:xfrm>
+      </p:grpSpPr>
+      <p:sp>
+        <p:nvSpPr>
+          <p:cNvPr id="2" name="Slide Image Placeholder 1"/>
+          <p:cNvSpPr>
+            <a:spLocks noGrp="1" noRot="1" noChangeAspect="1"/>
+          </p:cNvSpPr>
+          <p:nvPr>
+            <p:ph type="sldImg"/>
+          </p:nvPr>
+        </p:nvSpPr>
+        <p:spPr/>
+      </p:sp>
+      <p:sp>
+        <p:nvSpPr>
+          <p:cNvPr id="3" name="Notes Placeholder 2"/>
+          <p:cNvSpPr>
+            <a:spLocks noGrp="1"/>
+          </p:cNvSpPr>
+          <p:nvPr>
+            <p:ph type="body" idx="1"/>
+          </p:nvPr>
+        </p:nvSpPr>
+        <p:spPr/>
+        <p:txBody>
+          <a:bodyPr/>
+          <a:lstStyle/>
+          <a:p>
+            <a:r>
+              <a:rPr lang="en-US" dirty="0"/>
+              <a:t/>
+            </a:r>
+            <a:endParaRPr lang="en-US" dirty="0"/>
+          </a:p>
+        </p:txBody>
+      </p:sp>
+      <p:sp>
+        <p:nvSpPr>
+          <p:cNvPr id="4" name="Slide Number Placeholder 3"/>
+          <p:cNvSpPr>
+            <a:spLocks noGrp="1"/>
+          </p:cNvSpPr>
+          <p:nvPr>
+            <p:ph type="sldNum" sz="quarter" idx="10"/>
+          </p:nvPr>
+        </p:nvSpPr>
+        <p:spPr/>
+        <p:txBody>
+          <a:bodyPr/>
+          <a:lstStyle/>
+          <a:p>
+            <a:fld id="{F7021451-1387-4CA6-816F-3879F97B5CBC}" type="slidenum">
+              <a:rPr lang="en-US"/>
+              <a:t>14</a:t>
             </a:fld>
             <a:endParaRPr lang="en-US"/>
           </a:p>
@@ -1876,194 +2232,6 @@
         </p:nvSpPr>
         <p:spPr>
           <a:xfrm>
-            <a:off x="406301" y="1223963"/>
-            <a:ext cx="8498026" cy="274290"/>
-          </a:xfrm>
-          <a:prstGeom prst="rect">
-            <a:avLst/>
-          </a:prstGeom>
-          <a:noFill/>
-          <a:ln/>
-        </p:spPr>
-        <p:txBody>
-          <a:bodyPr wrap="square" lIns="0" tIns="0" rIns="0" bIns="0" rtlCol="0" anchor="t"/>
-          <a:lstStyle/>
-          <a:p>
-            <a:pPr algn="l" indent="0" marL="0">
-              <a:lnSpc>
-                <a:spcPts val="2160"/>
-              </a:lnSpc>
-              <a:spcBef>
-                <a:spcPts val="600"/>
-              </a:spcBef>
-              <a:spcAft>
-                <a:spcPts val="800"/>
-              </a:spcAft>
-              <a:buNone/>
-            </a:pPr>
-            <a:r>
-              <a:rPr lang="en-US" sz="1800" b="1" dirty="0">
-                <a:solidFill>
-                  <a:srgbClr val="E07A5F"/>
-                </a:solidFill>
-                <a:latin typeface="Georgia" pitchFamily="34" charset="0"/>
-                <a:ea typeface="Georgia" pitchFamily="34" charset="-122"/>
-                <a:cs typeface="Georgia" pitchFamily="34" charset="-120"/>
-              </a:rPr>
-              <a:t>Goal</a:t>
-            </a:r>
-            <a:endParaRPr lang="en-US" sz="1800" dirty="0"/>
-          </a:p>
-        </p:txBody>
-      </p:sp>
-      <p:sp>
-        <p:nvSpPr>
-          <p:cNvPr id="6" name="Text 4"/>
-          <p:cNvSpPr/>
-          <p:nvPr/>
-        </p:nvSpPr>
-        <p:spPr>
-          <a:xfrm>
-            <a:off x="406301" y="1637854"/>
-            <a:ext cx="8498026" cy="464641"/>
-          </a:xfrm>
-          <a:prstGeom prst="rect">
-            <a:avLst/>
-          </a:prstGeom>
-          <a:noFill/>
-          <a:ln/>
-        </p:spPr>
-        <p:txBody>
-          <a:bodyPr wrap="square" lIns="0" tIns="0" rIns="0" bIns="0" rtlCol="0" anchor="t"/>
-          <a:lstStyle/>
-          <a:p>
-            <a:pPr algn="l" indent="0" marL="0">
-              <a:lnSpc>
-                <a:spcPts val="1680"/>
-              </a:lnSpc>
-              <a:spcBef>
-                <a:spcPts val="300"/>
-              </a:spcBef>
-              <a:spcAft>
-                <a:spcPts val="300"/>
-              </a:spcAft>
-              <a:buNone/>
-            </a:pPr>
-            <a:r>
-              <a:rPr lang="en-US" sz="1200" dirty="0">
-                <a:solidFill>
-                  <a:srgbClr val="2C2C2C"/>
-                </a:solidFill>
-                <a:latin typeface="Verdana" pitchFamily="34" charset="0"/>
-                <a:ea typeface="Verdana" pitchFamily="34" charset="-122"/>
-                <a:cs typeface="Verdana" pitchFamily="34" charset="-120"/>
-              </a:rPr>
-              <a:t>Children compute </a:t>
-            </a:r>
-            <a:pPr algn="l" indent="0" marL="0">
-              <a:lnSpc>
-                <a:spcPts val="1680"/>
-              </a:lnSpc>
-              <a:spcBef>
-                <a:spcPts val="300"/>
-              </a:spcBef>
-              <a:spcAft>
-                <a:spcPts val="300"/>
-              </a:spcAft>
-              <a:buNone/>
-            </a:pPr>
-            <a:r>
-              <a:rPr lang="en-US" sz="1200" dirty="0">
-                <a:solidFill>
-                  <a:srgbClr val="2C2C2C"/>
-                </a:solidFill>
-                <a:latin typeface="Verdana" pitchFamily="34" charset="0"/>
-                <a:ea typeface="Verdana" pitchFamily="34" charset="-122"/>
-                <a:cs typeface="Verdana" pitchFamily="34" charset="-120"/>
-              </a:rPr>
-              <a:t>100 − N</a:t>
-            </a:r>
-            <a:pPr algn="l" indent="0" marL="0">
-              <a:lnSpc>
-                <a:spcPts val="1680"/>
-              </a:lnSpc>
-              <a:spcBef>
-                <a:spcPts val="300"/>
-              </a:spcBef>
-              <a:spcAft>
-                <a:spcPts val="300"/>
-              </a:spcAft>
-              <a:buNone/>
-            </a:pPr>
-            <a:r>
-              <a:rPr lang="en-US" sz="1200" dirty="0">
-                <a:solidFill>
-                  <a:srgbClr val="2C2C2C"/>
-                </a:solidFill>
-                <a:latin typeface="Verdana" pitchFamily="34" charset="0"/>
-                <a:ea typeface="Verdana" pitchFamily="34" charset="-122"/>
-                <a:cs typeface="Verdana" pitchFamily="34" charset="-120"/>
-              </a:rPr>
-              <a:t> for single-digit N using "friends to ten" and a bar model. By end of class: </a:t>
-            </a:r>
-            <a:pPr algn="l" indent="0" marL="0">
-              <a:lnSpc>
-                <a:spcPts val="1680"/>
-              </a:lnSpc>
-              <a:spcBef>
-                <a:spcPts val="300"/>
-              </a:spcBef>
-              <a:spcAft>
-                <a:spcPts val="300"/>
-              </a:spcAft>
-              <a:buNone/>
-            </a:pPr>
-            <a:r>
-              <a:rPr lang="en-US" sz="1200" dirty="0">
-                <a:solidFill>
-                  <a:srgbClr val="2C2C2C"/>
-                </a:solidFill>
-                <a:latin typeface="Verdana" pitchFamily="34" charset="0"/>
-                <a:ea typeface="Verdana" pitchFamily="34" charset="-122"/>
-                <a:cs typeface="Verdana" pitchFamily="34" charset="-120"/>
-              </a:rPr>
-              <a:t>100 − 7 = 93</a:t>
-            </a:r>
-            <a:pPr algn="l" indent="0" marL="0">
-              <a:lnSpc>
-                <a:spcPts val="1680"/>
-              </a:lnSpc>
-              <a:spcBef>
-                <a:spcPts val="300"/>
-              </a:spcBef>
-              <a:spcAft>
-                <a:spcPts val="300"/>
-              </a:spcAft>
-              <a:buNone/>
-            </a:pPr>
-            <a:r>
-              <a:rPr lang="en-US" sz="1200" dirty="0">
-                <a:solidFill>
-                  <a:srgbClr val="2C2C2C"/>
-                </a:solidFill>
-                <a:latin typeface="Verdana" pitchFamily="34" charset="0"/>
-                <a:ea typeface="Verdana" pitchFamily="34" charset="-122"/>
-                <a:cs typeface="Verdana" pitchFamily="34" charset="-120"/>
-              </a:rPr>
-              <a:t>, instantly.</a:t>
-            </a:r>
-            <a:endParaRPr lang="en-US" sz="1200" dirty="0"/>
-          </a:p>
-        </p:txBody>
-      </p:sp>
-      <p:sp>
-        <p:nvSpPr>
-          <p:cNvPr id="7" name="Text 5"/>
-          <p:cNvSpPr/>
-          <p:nvPr/>
-        </p:nvSpPr>
-        <p:spPr>
-          <a:xfrm>
             <a:off x="406301" y="4434929"/>
             <a:ext cx="8498026" cy="213271"/>
           </a:xfrm>
@@ -2208,6 +2376,1112 @@
                 <a:ea typeface="Georgia" pitchFamily="34" charset="-122"/>
                 <a:cs typeface="Georgia" pitchFamily="34" charset="-120"/>
               </a:rPr>
+              <a:t>Activity: bar-model worksheet (15 min) (cont.)</a:t>
+            </a:r>
+            <a:endParaRPr lang="en-US" sz="1800" dirty="0"/>
+          </a:p>
+        </p:txBody>
+      </p:sp>
+      <p:sp>
+        <p:nvSpPr>
+          <p:cNvPr id="4" name="Text 2"/>
+          <p:cNvSpPr/>
+          <p:nvPr/>
+        </p:nvSpPr>
+        <p:spPr>
+          <a:xfrm>
+            <a:off x="406301" y="870942"/>
+            <a:ext cx="8498026" cy="426541"/>
+          </a:xfrm>
+          <a:prstGeom prst="rect">
+            <a:avLst/>
+          </a:prstGeom>
+          <a:noFill/>
+          <a:ln/>
+        </p:spPr>
+        <p:txBody>
+          <a:bodyPr wrap="square" lIns="0" tIns="0" rIns="0" bIns="0" rtlCol="0" anchor="t"/>
+          <a:lstStyle/>
+          <a:p>
+            <a:pPr algn="l" indent="0" marL="0">
+              <a:lnSpc>
+                <a:spcPts val="1680"/>
+              </a:lnSpc>
+              <a:spcBef>
+                <a:spcPts val="300"/>
+              </a:spcBef>
+              <a:spcAft>
+                <a:spcPts val="300"/>
+              </a:spcAft>
+              <a:buNone/>
+            </a:pPr>
+            <a:r>
+              <a:rPr lang="en-US" sz="1200" dirty="0">
+                <a:solidFill>
+                  <a:srgbClr val="2C2C2C"/>
+                </a:solidFill>
+                <a:latin typeface="Verdana" pitchFamily="34" charset="0"/>
+                <a:ea typeface="Verdana" pitchFamily="34" charset="-122"/>
+                <a:cs typeface="Verdana" pitchFamily="34" charset="-120"/>
+              </a:rPr>
+              <a:t>For each: shade the right number of squares, then read off the answer. Bonus: write the friend pair next to it.</a:t>
+            </a:r>
+            <a:endParaRPr lang="en-US" sz="1200" dirty="0"/>
+          </a:p>
+        </p:txBody>
+      </p:sp>
+      <p:sp>
+        <p:nvSpPr>
+          <p:cNvPr id="5" name="Text 3"/>
+          <p:cNvSpPr/>
+          <p:nvPr/>
+        </p:nvSpPr>
+        <p:spPr>
+          <a:xfrm>
+            <a:off x="406301" y="4434929"/>
+            <a:ext cx="8498026" cy="213271"/>
+          </a:xfrm>
+          <a:prstGeom prst="rect">
+            <a:avLst/>
+          </a:prstGeom>
+          <a:noFill/>
+          <a:ln/>
+        </p:spPr>
+        <p:txBody>
+          <a:bodyPr wrap="square" lIns="0" tIns="0" rIns="0" bIns="0" rtlCol="0" anchor="t"/>
+          <a:lstStyle/>
+          <a:p>
+            <a:pPr algn="l" indent="0" marL="0">
+              <a:lnSpc>
+                <a:spcPts val="1680"/>
+              </a:lnSpc>
+              <a:spcBef>
+                <a:spcPts val="300"/>
+              </a:spcBef>
+              <a:spcAft>
+                <a:spcPts val="300"/>
+              </a:spcAft>
+              <a:buNone/>
+            </a:pPr>
+            <a:r>
+              <a:rPr lang="en-US" sz="1200" dirty="0">
+                <a:solidFill>
+                  <a:srgbClr val="2C2C2C"/>
+                </a:solidFill>
+                <a:latin typeface="Verdana" pitchFamily="34" charset="0"/>
+                <a:ea typeface="Verdana" pitchFamily="34" charset="-122"/>
+                <a:cs typeface="Verdana" pitchFamily="34" charset="-120"/>
+              </a:rPr>
+              <a:t>Primary ·  · IKS Curriculum</a:t>
+            </a:r>
+            <a:endParaRPr lang="en-US" sz="1200" dirty="0"/>
+          </a:p>
+        </p:txBody>
+      </p:sp>
+    </p:spTree>
+  </p:cSld>
+  <p:clrMapOvr>
+    <a:masterClrMapping/>
+  </p:clrMapOvr>
+</p:sld>
+</file>
+
+<file path=ppt/slides/slide11.xml><?xml version="1.0" encoding="utf-8"?>
+<p:sld xmlns:a="http://schemas.openxmlformats.org/drawingml/2006/main" xmlns:r="http://schemas.openxmlformats.org/officeDocument/2006/relationships" xmlns:p="http://schemas.openxmlformats.org/presentationml/2006/main">
+  <p:cSld name="Slide 11">
+    <p:bg>
+      <p:bgPr>
+        <a:solidFill>
+          <a:srgbClr val="FAF7F2"/>
+        </a:solidFill>
+      </p:bgPr>
+    </p:bg>
+    <p:spTree>
+      <p:nvGrpSpPr>
+        <p:cNvPr id="1" name=""/>
+        <p:cNvGrpSpPr/>
+        <p:nvPr/>
+      </p:nvGrpSpPr>
+      <p:grpSpPr>
+        <a:xfrm>
+          <a:off x="0" y="0"/>
+          <a:ext cx="0" cy="0"/>
+          <a:chOff x="0" y="0"/>
+          <a:chExt cx="0" cy="0"/>
+        </a:xfrm>
+      </p:grpSpPr>
+      <p:sp>
+        <p:nvSpPr>
+          <p:cNvPr id="2" name="Text 0"/>
+          <p:cNvSpPr/>
+          <p:nvPr/>
+        </p:nvSpPr>
+        <p:spPr>
+          <a:xfrm>
+            <a:off x="0" y="0"/>
+            <a:ext cx="9144000" cy="101501"/>
+          </a:xfrm>
+          <a:prstGeom prst="rect">
+            <a:avLst/>
+          </a:prstGeom>
+          <a:solidFill>
+            <a:srgbClr val="87A96B"/>
+          </a:solidFill>
+          <a:ln/>
+        </p:spPr>
+        <p:txBody>
+          <a:bodyPr wrap="square" rtlCol="0" anchor="ctr"/>
+          <a:lstStyle/>
+          <a:p>
+            <a:pPr indent="0" marL="0">
+              <a:buNone/>
+            </a:pPr>
+            <a:endParaRPr lang="en-US" dirty="0"/>
+          </a:p>
+        </p:txBody>
+      </p:sp>
+      <p:sp>
+        <p:nvSpPr>
+          <p:cNvPr id="3" name="Text 1"/>
+          <p:cNvSpPr/>
+          <p:nvPr/>
+        </p:nvSpPr>
+        <p:spPr>
+          <a:xfrm>
+            <a:off x="406301" y="457051"/>
+            <a:ext cx="8498026" cy="274290"/>
+          </a:xfrm>
+          <a:prstGeom prst="rect">
+            <a:avLst/>
+          </a:prstGeom>
+          <a:noFill/>
+          <a:ln/>
+        </p:spPr>
+        <p:txBody>
+          <a:bodyPr wrap="square" lIns="0" tIns="0" rIns="0" bIns="0" rtlCol="0" anchor="t"/>
+          <a:lstStyle/>
+          <a:p>
+            <a:pPr algn="l" indent="0" marL="0">
+              <a:lnSpc>
+                <a:spcPts val="2160"/>
+              </a:lnSpc>
+              <a:spcBef>
+                <a:spcPts val="600"/>
+              </a:spcBef>
+              <a:spcAft>
+                <a:spcPts val="800"/>
+              </a:spcAft>
+              <a:buNone/>
+            </a:pPr>
+            <a:r>
+              <a:rPr lang="en-US" sz="1800" b="1" dirty="0">
+                <a:solidFill>
+                  <a:srgbClr val="E07A5F"/>
+                </a:solidFill>
+                <a:latin typeface="Georgia" pitchFamily="34" charset="0"/>
+                <a:ea typeface="Georgia" pitchFamily="34" charset="-122"/>
+                <a:cs typeface="Georgia" pitchFamily="34" charset="-120"/>
+              </a:rPr>
+              <a:t>Wrap-up (5 min)</a:t>
+            </a:r>
+            <a:endParaRPr lang="en-US" sz="1800" dirty="0"/>
+          </a:p>
+        </p:txBody>
+      </p:sp>
+      <p:sp>
+        <p:nvSpPr>
+          <p:cNvPr id="4" name="Text 2"/>
+          <p:cNvSpPr/>
+          <p:nvPr/>
+        </p:nvSpPr>
+        <p:spPr>
+          <a:xfrm>
+            <a:off x="634901" y="883593"/>
+            <a:ext cx="8102798" cy="554236"/>
+          </a:xfrm>
+          <a:prstGeom prst="rect">
+            <a:avLst/>
+          </a:prstGeom>
+          <a:noFill/>
+          <a:ln/>
+        </p:spPr>
+        <p:txBody>
+          <a:bodyPr wrap="square" lIns="0" tIns="0" rIns="0" bIns="0" rtlCol="0" anchor="t"/>
+          <a:lstStyle/>
+          <a:p>
+            <a:pPr algn="l" marL="342900" indent="-342900">
+              <a:lnSpc>
+                <a:spcPts val="1620"/>
+              </a:lnSpc>
+              <a:spcAft>
+                <a:spcPts val="300"/>
+              </a:spcAft>
+              <a:buSzPct val="100000"/>
+              <a:buChar char="•"/>
+            </a:pPr>
+            <a:r>
+              <a:rPr lang="en-US" sz="1200" dirty="0">
+                <a:solidFill>
+                  <a:srgbClr val="2C2C2C"/>
+                </a:solidFill>
+                <a:latin typeface="Verdana" pitchFamily="34" charset="0"/>
+                <a:ea typeface="Verdana" pitchFamily="34" charset="-122"/>
+                <a:cs typeface="Verdana" pitchFamily="34" charset="-120"/>
+              </a:rPr>
+              <a:t>Quick fire: teacher calls </a:t>
+            </a:r>
+            <a:pPr algn="l" indent="0" marL="0">
+              <a:lnSpc>
+                <a:spcPts val="1620"/>
+              </a:lnSpc>
+              <a:spcAft>
+                <a:spcPts val="300"/>
+              </a:spcAft>
+              <a:buNone/>
+            </a:pPr>
+            <a:r>
+              <a:rPr lang="en-US" sz="1200" dirty="0">
+                <a:solidFill>
+                  <a:srgbClr val="2C2C2C"/>
+                </a:solidFill>
+                <a:latin typeface="Verdana" pitchFamily="34" charset="0"/>
+                <a:ea typeface="Verdana" pitchFamily="34" charset="-122"/>
+                <a:cs typeface="Verdana" pitchFamily="34" charset="-120"/>
+              </a:rPr>
+              <a:t>100 − N</a:t>
+            </a:r>
+            <a:pPr algn="l" indent="0" marL="0">
+              <a:lnSpc>
+                <a:spcPts val="1620"/>
+              </a:lnSpc>
+              <a:spcAft>
+                <a:spcPts val="300"/>
+              </a:spcAft>
+              <a:buNone/>
+            </a:pPr>
+            <a:r>
+              <a:rPr lang="en-US" sz="1200" dirty="0">
+                <a:solidFill>
+                  <a:srgbClr val="2C2C2C"/>
+                </a:solidFill>
+                <a:latin typeface="Verdana" pitchFamily="34" charset="0"/>
+                <a:ea typeface="Verdana" pitchFamily="34" charset="-122"/>
+                <a:cs typeface="Verdana" pitchFamily="34" charset="-120"/>
+              </a:rPr>
+              <a:t>; children chorus the answer.</a:t>
+            </a:r>
+            <a:endParaRPr lang="en-US" sz="1200" dirty="0"/>
+          </a:p>
+          <a:p>
+            <a:pPr algn="l" marL="342900" indent="-342900">
+              <a:lnSpc>
+                <a:spcPts val="1620"/>
+              </a:lnSpc>
+              <a:spcAft>
+                <a:spcPts val="300"/>
+              </a:spcAft>
+              <a:buSzPct val="100000"/>
+              <a:buChar char="•"/>
+            </a:pPr>
+            <a:r>
+              <a:rPr lang="en-US" sz="1200" dirty="0">
+                <a:solidFill>
+                  <a:srgbClr val="2C2C2C"/>
+                </a:solidFill>
+                <a:latin typeface="Verdana" pitchFamily="34" charset="0"/>
+                <a:ea typeface="Verdana" pitchFamily="34" charset="-122"/>
+                <a:cs typeface="Verdana" pitchFamily="34" charset="-120"/>
+              </a:rPr>
+              <a:t>Daily chant.</a:t>
+            </a:r>
+            <a:endParaRPr lang="en-US" sz="1200" dirty="0"/>
+          </a:p>
+        </p:txBody>
+      </p:sp>
+      <p:sp>
+        <p:nvSpPr>
+          <p:cNvPr id="5" name="Text 3"/>
+          <p:cNvSpPr/>
+          <p:nvPr/>
+        </p:nvSpPr>
+        <p:spPr>
+          <a:xfrm>
+            <a:off x="406301" y="4434929"/>
+            <a:ext cx="8498026" cy="213271"/>
+          </a:xfrm>
+          <a:prstGeom prst="rect">
+            <a:avLst/>
+          </a:prstGeom>
+          <a:noFill/>
+          <a:ln/>
+        </p:spPr>
+        <p:txBody>
+          <a:bodyPr wrap="square" lIns="0" tIns="0" rIns="0" bIns="0" rtlCol="0" anchor="t"/>
+          <a:lstStyle/>
+          <a:p>
+            <a:pPr algn="l" indent="0" marL="0">
+              <a:lnSpc>
+                <a:spcPts val="1680"/>
+              </a:lnSpc>
+              <a:spcBef>
+                <a:spcPts val="300"/>
+              </a:spcBef>
+              <a:spcAft>
+                <a:spcPts val="300"/>
+              </a:spcAft>
+              <a:buNone/>
+            </a:pPr>
+            <a:r>
+              <a:rPr lang="en-US" sz="1200" dirty="0">
+                <a:solidFill>
+                  <a:srgbClr val="2C2C2C"/>
+                </a:solidFill>
+                <a:latin typeface="Verdana" pitchFamily="34" charset="0"/>
+                <a:ea typeface="Verdana" pitchFamily="34" charset="-122"/>
+                <a:cs typeface="Verdana" pitchFamily="34" charset="-120"/>
+              </a:rPr>
+              <a:t>Primary ·  · IKS Curriculum</a:t>
+            </a:r>
+            <a:endParaRPr lang="en-US" sz="1200" dirty="0"/>
+          </a:p>
+        </p:txBody>
+      </p:sp>
+    </p:spTree>
+  </p:cSld>
+  <p:clrMapOvr>
+    <a:masterClrMapping/>
+  </p:clrMapOvr>
+</p:sld>
+</file>
+
+<file path=ppt/slides/slide12.xml><?xml version="1.0" encoding="utf-8"?>
+<p:sld xmlns:a="http://schemas.openxmlformats.org/drawingml/2006/main" xmlns:r="http://schemas.openxmlformats.org/officeDocument/2006/relationships" xmlns:p="http://schemas.openxmlformats.org/presentationml/2006/main">
+  <p:cSld name="Slide 12">
+    <p:bg>
+      <p:bgPr>
+        <a:solidFill>
+          <a:srgbClr val="FAF7F2"/>
+        </a:solidFill>
+      </p:bgPr>
+    </p:bg>
+    <p:spTree>
+      <p:nvGrpSpPr>
+        <p:cNvPr id="1" name=""/>
+        <p:cNvGrpSpPr/>
+        <p:nvPr/>
+      </p:nvGrpSpPr>
+      <p:grpSpPr>
+        <a:xfrm>
+          <a:off x="0" y="0"/>
+          <a:ext cx="0" cy="0"/>
+          <a:chOff x="0" y="0"/>
+          <a:chExt cx="0" cy="0"/>
+        </a:xfrm>
+      </p:grpSpPr>
+      <p:sp>
+        <p:nvSpPr>
+          <p:cNvPr id="2" name="Text 0"/>
+          <p:cNvSpPr/>
+          <p:nvPr/>
+        </p:nvSpPr>
+        <p:spPr>
+          <a:xfrm>
+            <a:off x="0" y="0"/>
+            <a:ext cx="9144000" cy="101501"/>
+          </a:xfrm>
+          <a:prstGeom prst="rect">
+            <a:avLst/>
+          </a:prstGeom>
+          <a:solidFill>
+            <a:srgbClr val="87A96B"/>
+          </a:solidFill>
+          <a:ln/>
+        </p:spPr>
+        <p:txBody>
+          <a:bodyPr wrap="square" rtlCol="0" anchor="ctr"/>
+          <a:lstStyle/>
+          <a:p>
+            <a:pPr indent="0" marL="0">
+              <a:buNone/>
+            </a:pPr>
+            <a:endParaRPr lang="en-US" dirty="0"/>
+          </a:p>
+        </p:txBody>
+      </p:sp>
+      <p:sp>
+        <p:nvSpPr>
+          <p:cNvPr id="3" name="Text 1"/>
+          <p:cNvSpPr/>
+          <p:nvPr/>
+        </p:nvSpPr>
+        <p:spPr>
+          <a:xfrm>
+            <a:off x="406301" y="457051"/>
+            <a:ext cx="8498026" cy="274290"/>
+          </a:xfrm>
+          <a:prstGeom prst="rect">
+            <a:avLst/>
+          </a:prstGeom>
+          <a:noFill/>
+          <a:ln/>
+        </p:spPr>
+        <p:txBody>
+          <a:bodyPr wrap="square" lIns="0" tIns="0" rIns="0" bIns="0" rtlCol="0" anchor="t"/>
+          <a:lstStyle/>
+          <a:p>
+            <a:pPr algn="l" indent="0" marL="0">
+              <a:lnSpc>
+                <a:spcPts val="2160"/>
+              </a:lnSpc>
+              <a:spcBef>
+                <a:spcPts val="600"/>
+              </a:spcBef>
+              <a:spcAft>
+                <a:spcPts val="800"/>
+              </a:spcAft>
+              <a:buNone/>
+            </a:pPr>
+            <a:r>
+              <a:rPr lang="en-US" sz="1800" b="1" dirty="0">
+                <a:solidFill>
+                  <a:srgbClr val="E07A5F"/>
+                </a:solidFill>
+                <a:latin typeface="Georgia" pitchFamily="34" charset="0"/>
+                <a:ea typeface="Georgia" pitchFamily="34" charset="-122"/>
+                <a:cs typeface="Georgia" pitchFamily="34" charset="-120"/>
+              </a:rPr>
+              <a:t>Homework / take-home</a:t>
+            </a:r>
+            <a:endParaRPr lang="en-US" sz="1800" dirty="0"/>
+          </a:p>
+        </p:txBody>
+      </p:sp>
+      <p:sp>
+        <p:nvSpPr>
+          <p:cNvPr id="4" name="Text 2"/>
+          <p:cNvSpPr/>
+          <p:nvPr/>
+        </p:nvSpPr>
+        <p:spPr>
+          <a:xfrm>
+            <a:off x="634901" y="883593"/>
+            <a:ext cx="8102798" cy="544711"/>
+          </a:xfrm>
+          <a:prstGeom prst="rect">
+            <a:avLst/>
+          </a:prstGeom>
+          <a:noFill/>
+          <a:ln/>
+        </p:spPr>
+        <p:txBody>
+          <a:bodyPr wrap="square" lIns="0" tIns="0" rIns="0" bIns="0" rtlCol="0" anchor="t"/>
+          <a:lstStyle/>
+          <a:p>
+            <a:pPr algn="l" marL="342900" indent="-342900">
+              <a:lnSpc>
+                <a:spcPts val="1620"/>
+              </a:lnSpc>
+              <a:spcAft>
+                <a:spcPts val="300"/>
+              </a:spcAft>
+              <a:buSzPct val="100000"/>
+              <a:buChar char="•"/>
+            </a:pPr>
+            <a:r>
+              <a:rPr lang="en-US" sz="1200" dirty="0">
+                <a:solidFill>
+                  <a:srgbClr val="2C2C2C"/>
+                </a:solidFill>
+                <a:latin typeface="Verdana" pitchFamily="34" charset="0"/>
+                <a:ea typeface="Verdana" pitchFamily="34" charset="-122"/>
+                <a:cs typeface="Verdana" pitchFamily="34" charset="-120"/>
+              </a:rPr>
+              <a:t>10 problems: </a:t>
+            </a:r>
+            <a:pPr algn="l" indent="0" marL="0">
+              <a:lnSpc>
+                <a:spcPts val="1620"/>
+              </a:lnSpc>
+              <a:spcAft>
+                <a:spcPts val="300"/>
+              </a:spcAft>
+              <a:buNone/>
+            </a:pPr>
+            <a:r>
+              <a:rPr lang="en-US" sz="1200" dirty="0">
+                <a:solidFill>
+                  <a:srgbClr val="2C2C2C"/>
+                </a:solidFill>
+                <a:latin typeface="Verdana" pitchFamily="34" charset="0"/>
+                <a:ea typeface="Verdana" pitchFamily="34" charset="-122"/>
+                <a:cs typeface="Verdana" pitchFamily="34" charset="-120"/>
+              </a:rPr>
+              <a:t>100 − 4, 100 − 9, 100 − 6, 100 − 2, 100 − 5, 100 − 8, 100 − 3, 100 − 7, 100 − 1, 100 − 0</a:t>
+            </a:r>
+            <a:pPr algn="l" indent="0" marL="0">
+              <a:lnSpc>
+                <a:spcPts val="1620"/>
+              </a:lnSpc>
+              <a:spcAft>
+                <a:spcPts val="300"/>
+              </a:spcAft>
+              <a:buNone/>
+            </a:pPr>
+            <a:r>
+              <a:rPr lang="en-US" sz="1200" dirty="0">
+                <a:solidFill>
+                  <a:srgbClr val="2C2C2C"/>
+                </a:solidFill>
+                <a:latin typeface="Verdana" pitchFamily="34" charset="0"/>
+                <a:ea typeface="Verdana" pitchFamily="34" charset="-122"/>
+                <a:cs typeface="Verdana" pitchFamily="34" charset="-120"/>
+              </a:rPr>
+              <a:t>. Aim for under 30 seconds.</a:t>
+            </a:r>
+            <a:endParaRPr lang="en-US" sz="1200" dirty="0"/>
+          </a:p>
+        </p:txBody>
+      </p:sp>
+      <p:sp>
+        <p:nvSpPr>
+          <p:cNvPr id="5" name="Text 3"/>
+          <p:cNvSpPr/>
+          <p:nvPr/>
+        </p:nvSpPr>
+        <p:spPr>
+          <a:xfrm>
+            <a:off x="406301" y="4434929"/>
+            <a:ext cx="8498026" cy="213271"/>
+          </a:xfrm>
+          <a:prstGeom prst="rect">
+            <a:avLst/>
+          </a:prstGeom>
+          <a:noFill/>
+          <a:ln/>
+        </p:spPr>
+        <p:txBody>
+          <a:bodyPr wrap="square" lIns="0" tIns="0" rIns="0" bIns="0" rtlCol="0" anchor="t"/>
+          <a:lstStyle/>
+          <a:p>
+            <a:pPr algn="l" indent="0" marL="0">
+              <a:lnSpc>
+                <a:spcPts val="1680"/>
+              </a:lnSpc>
+              <a:spcBef>
+                <a:spcPts val="300"/>
+              </a:spcBef>
+              <a:spcAft>
+                <a:spcPts val="300"/>
+              </a:spcAft>
+              <a:buNone/>
+            </a:pPr>
+            <a:r>
+              <a:rPr lang="en-US" sz="1200" dirty="0">
+                <a:solidFill>
+                  <a:srgbClr val="2C2C2C"/>
+                </a:solidFill>
+                <a:latin typeface="Verdana" pitchFamily="34" charset="0"/>
+                <a:ea typeface="Verdana" pitchFamily="34" charset="-122"/>
+                <a:cs typeface="Verdana" pitchFamily="34" charset="-120"/>
+              </a:rPr>
+              <a:t>Primary ·  · IKS Curriculum</a:t>
+            </a:r>
+            <a:endParaRPr lang="en-US" sz="1200" dirty="0"/>
+          </a:p>
+        </p:txBody>
+      </p:sp>
+    </p:spTree>
+  </p:cSld>
+  <p:clrMapOvr>
+    <a:masterClrMapping/>
+  </p:clrMapOvr>
+</p:sld>
+</file>
+
+<file path=ppt/slides/slide13.xml><?xml version="1.0" encoding="utf-8"?>
+<p:sld xmlns:a="http://schemas.openxmlformats.org/drawingml/2006/main" xmlns:r="http://schemas.openxmlformats.org/officeDocument/2006/relationships" xmlns:p="http://schemas.openxmlformats.org/presentationml/2006/main">
+  <p:cSld name="Slide 13">
+    <p:bg>
+      <p:bgPr>
+        <a:solidFill>
+          <a:srgbClr val="FAF7F2"/>
+        </a:solidFill>
+      </p:bgPr>
+    </p:bg>
+    <p:spTree>
+      <p:nvGrpSpPr>
+        <p:cNvPr id="1" name=""/>
+        <p:cNvGrpSpPr/>
+        <p:nvPr/>
+      </p:nvGrpSpPr>
+      <p:grpSpPr>
+        <a:xfrm>
+          <a:off x="0" y="0"/>
+          <a:ext cx="0" cy="0"/>
+          <a:chOff x="0" y="0"/>
+          <a:chExt cx="0" cy="0"/>
+        </a:xfrm>
+      </p:grpSpPr>
+      <p:sp>
+        <p:nvSpPr>
+          <p:cNvPr id="2" name="Text 0"/>
+          <p:cNvSpPr/>
+          <p:nvPr/>
+        </p:nvSpPr>
+        <p:spPr>
+          <a:xfrm>
+            <a:off x="0" y="0"/>
+            <a:ext cx="9144000" cy="101501"/>
+          </a:xfrm>
+          <a:prstGeom prst="rect">
+            <a:avLst/>
+          </a:prstGeom>
+          <a:solidFill>
+            <a:srgbClr val="87A96B"/>
+          </a:solidFill>
+          <a:ln/>
+        </p:spPr>
+        <p:txBody>
+          <a:bodyPr wrap="square" rtlCol="0" anchor="ctr"/>
+          <a:lstStyle/>
+          <a:p>
+            <a:pPr indent="0" marL="0">
+              <a:buNone/>
+            </a:pPr>
+            <a:endParaRPr lang="en-US" dirty="0"/>
+          </a:p>
+        </p:txBody>
+      </p:sp>
+      <p:sp>
+        <p:nvSpPr>
+          <p:cNvPr id="3" name="Text 1"/>
+          <p:cNvSpPr/>
+          <p:nvPr/>
+        </p:nvSpPr>
+        <p:spPr>
+          <a:xfrm>
+            <a:off x="406301" y="457051"/>
+            <a:ext cx="8498026" cy="274290"/>
+          </a:xfrm>
+          <a:prstGeom prst="rect">
+            <a:avLst/>
+          </a:prstGeom>
+          <a:noFill/>
+          <a:ln/>
+        </p:spPr>
+        <p:txBody>
+          <a:bodyPr wrap="square" lIns="0" tIns="0" rIns="0" bIns="0" rtlCol="0" anchor="t"/>
+          <a:lstStyle/>
+          <a:p>
+            <a:pPr algn="l" indent="0" marL="0">
+              <a:lnSpc>
+                <a:spcPts val="2160"/>
+              </a:lnSpc>
+              <a:spcBef>
+                <a:spcPts val="600"/>
+              </a:spcBef>
+              <a:spcAft>
+                <a:spcPts val="800"/>
+              </a:spcAft>
+              <a:buNone/>
+            </a:pPr>
+            <a:r>
+              <a:rPr lang="en-US" sz="1800" b="1" dirty="0">
+                <a:solidFill>
+                  <a:srgbClr val="E07A5F"/>
+                </a:solidFill>
+                <a:latin typeface="Georgia" pitchFamily="34" charset="0"/>
+                <a:ea typeface="Georgia" pitchFamily="34" charset="-122"/>
+                <a:cs typeface="Georgia" pitchFamily="34" charset="-120"/>
+              </a:rPr>
+              <a:t>Differentiation</a:t>
+            </a:r>
+            <a:endParaRPr lang="en-US" sz="1800" dirty="0"/>
+          </a:p>
+        </p:txBody>
+      </p:sp>
+      <p:sp>
+        <p:nvSpPr>
+          <p:cNvPr id="4" name="Text 2"/>
+          <p:cNvSpPr/>
+          <p:nvPr/>
+        </p:nvSpPr>
+        <p:spPr>
+          <a:xfrm>
+            <a:off x="634901" y="883593"/>
+            <a:ext cx="8102798" cy="554236"/>
+          </a:xfrm>
+          <a:prstGeom prst="rect">
+            <a:avLst/>
+          </a:prstGeom>
+          <a:noFill/>
+          <a:ln/>
+        </p:spPr>
+        <p:txBody>
+          <a:bodyPr wrap="square" lIns="0" tIns="0" rIns="0" bIns="0" rtlCol="0" anchor="t"/>
+          <a:lstStyle/>
+          <a:p>
+            <a:pPr algn="l" marL="342900" indent="-342900">
+              <a:lnSpc>
+                <a:spcPts val="1620"/>
+              </a:lnSpc>
+              <a:spcAft>
+                <a:spcPts val="300"/>
+              </a:spcAft>
+              <a:buSzPct val="100000"/>
+              <a:buChar char="•"/>
+            </a:pPr>
+            <a:r>
+              <a:rPr lang="en-US" sz="1200" b="1" dirty="0">
+                <a:solidFill>
+                  <a:srgbClr val="2C2C2C"/>
+                </a:solidFill>
+                <a:latin typeface="Verdana" pitchFamily="34" charset="0"/>
+                <a:ea typeface="Verdana" pitchFamily="34" charset="-122"/>
+                <a:cs typeface="Verdana" pitchFamily="34" charset="-120"/>
+              </a:rPr>
+              <a:t>Tier up:</a:t>
+            </a:r>
+            <a:pPr algn="l" indent="0" marL="0">
+              <a:lnSpc>
+                <a:spcPts val="1620"/>
+              </a:lnSpc>
+              <a:spcAft>
+                <a:spcPts val="300"/>
+              </a:spcAft>
+              <a:buNone/>
+            </a:pPr>
+            <a:r>
+              <a:rPr lang="en-US" sz="1200" dirty="0">
+                <a:solidFill>
+                  <a:srgbClr val="2C2C2C"/>
+                </a:solidFill>
+                <a:latin typeface="Verdana" pitchFamily="34" charset="0"/>
+                <a:ea typeface="Verdana" pitchFamily="34" charset="-122"/>
+                <a:cs typeface="Verdana" pitchFamily="34" charset="-120"/>
+              </a:rPr>
+              <a:t> Try </a:t>
+            </a:r>
+            <a:pPr algn="l" indent="0" marL="0">
+              <a:lnSpc>
+                <a:spcPts val="1620"/>
+              </a:lnSpc>
+              <a:spcAft>
+                <a:spcPts val="300"/>
+              </a:spcAft>
+              <a:buNone/>
+            </a:pPr>
+            <a:r>
+              <a:rPr lang="en-US" sz="1200" dirty="0">
+                <a:solidFill>
+                  <a:srgbClr val="2C2C2C"/>
+                </a:solidFill>
+                <a:latin typeface="Verdana" pitchFamily="34" charset="0"/>
+                <a:ea typeface="Verdana" pitchFamily="34" charset="-122"/>
+                <a:cs typeface="Verdana" pitchFamily="34" charset="-120"/>
+              </a:rPr>
+              <a:t>100 − 10</a:t>
+            </a:r>
+            <a:pPr algn="l" indent="0" marL="0">
+              <a:lnSpc>
+                <a:spcPts val="1620"/>
+              </a:lnSpc>
+              <a:spcAft>
+                <a:spcPts val="300"/>
+              </a:spcAft>
+              <a:buNone/>
+            </a:pPr>
+            <a:r>
+              <a:rPr lang="en-US" sz="1200" dirty="0">
+                <a:solidFill>
+                  <a:srgbClr val="2C2C2C"/>
+                </a:solidFill>
+                <a:latin typeface="Verdana" pitchFamily="34" charset="0"/>
+                <a:ea typeface="Verdana" pitchFamily="34" charset="-122"/>
+                <a:cs typeface="Verdana" pitchFamily="34" charset="-120"/>
+              </a:rPr>
+              <a:t>, </a:t>
+            </a:r>
+            <a:pPr algn="l" indent="0" marL="0">
+              <a:lnSpc>
+                <a:spcPts val="1620"/>
+              </a:lnSpc>
+              <a:spcAft>
+                <a:spcPts val="300"/>
+              </a:spcAft>
+              <a:buNone/>
+            </a:pPr>
+            <a:r>
+              <a:rPr lang="en-US" sz="1200" dirty="0">
+                <a:solidFill>
+                  <a:srgbClr val="2C2C2C"/>
+                </a:solidFill>
+                <a:latin typeface="Verdana" pitchFamily="34" charset="0"/>
+                <a:ea typeface="Verdana" pitchFamily="34" charset="-122"/>
+                <a:cs typeface="Verdana" pitchFamily="34" charset="-120"/>
+              </a:rPr>
+              <a:t>100 − 15</a:t>
+            </a:r>
+            <a:pPr algn="l" indent="0" marL="0">
+              <a:lnSpc>
+                <a:spcPts val="1620"/>
+              </a:lnSpc>
+              <a:spcAft>
+                <a:spcPts val="300"/>
+              </a:spcAft>
+              <a:buNone/>
+            </a:pPr>
+            <a:r>
+              <a:rPr lang="en-US" sz="1200" dirty="0">
+                <a:solidFill>
+                  <a:srgbClr val="2C2C2C"/>
+                </a:solidFill>
+                <a:latin typeface="Verdana" pitchFamily="34" charset="0"/>
+                <a:ea typeface="Verdana" pitchFamily="34" charset="-122"/>
+                <a:cs typeface="Verdana" pitchFamily="34" charset="-120"/>
+              </a:rPr>
+              <a:t>, </a:t>
+            </a:r>
+            <a:pPr algn="l" indent="0" marL="0">
+              <a:lnSpc>
+                <a:spcPts val="1620"/>
+              </a:lnSpc>
+              <a:spcAft>
+                <a:spcPts val="300"/>
+              </a:spcAft>
+              <a:buNone/>
+            </a:pPr>
+            <a:r>
+              <a:rPr lang="en-US" sz="1200" dirty="0">
+                <a:solidFill>
+                  <a:srgbClr val="2C2C2C"/>
+                </a:solidFill>
+                <a:latin typeface="Verdana" pitchFamily="34" charset="0"/>
+                <a:ea typeface="Verdana" pitchFamily="34" charset="-122"/>
+                <a:cs typeface="Verdana" pitchFamily="34" charset="-120"/>
+              </a:rPr>
+              <a:t>100 − 20</a:t>
+            </a:r>
+            <a:pPr algn="l" indent="0" marL="0">
+              <a:lnSpc>
+                <a:spcPts val="1620"/>
+              </a:lnSpc>
+              <a:spcAft>
+                <a:spcPts val="300"/>
+              </a:spcAft>
+              <a:buNone/>
+            </a:pPr>
+            <a:r>
+              <a:rPr lang="en-US" sz="1200" dirty="0">
+                <a:solidFill>
+                  <a:srgbClr val="2C2C2C"/>
+                </a:solidFill>
+                <a:latin typeface="Verdana" pitchFamily="34" charset="0"/>
+                <a:ea typeface="Verdana" pitchFamily="34" charset="-122"/>
+                <a:cs typeface="Verdana" pitchFamily="34" charset="-120"/>
+              </a:rPr>
+              <a:t>. Bar model still works.</a:t>
+            </a:r>
+            <a:endParaRPr lang="en-US" sz="1200" dirty="0"/>
+          </a:p>
+          <a:p>
+            <a:pPr algn="l" marL="342900" indent="-342900">
+              <a:lnSpc>
+                <a:spcPts val="1620"/>
+              </a:lnSpc>
+              <a:spcAft>
+                <a:spcPts val="300"/>
+              </a:spcAft>
+              <a:buSzPct val="100000"/>
+              <a:buChar char="•"/>
+            </a:pPr>
+            <a:r>
+              <a:rPr lang="en-US" sz="1200" b="1" dirty="0">
+                <a:solidFill>
+                  <a:srgbClr val="2C2C2C"/>
+                </a:solidFill>
+                <a:latin typeface="Verdana" pitchFamily="34" charset="0"/>
+                <a:ea typeface="Verdana" pitchFamily="34" charset="-122"/>
+                <a:cs typeface="Verdana" pitchFamily="34" charset="-120"/>
+              </a:rPr>
+              <a:t>Tier down:</a:t>
+            </a:r>
+            <a:pPr algn="l" indent="0" marL="0">
+              <a:lnSpc>
+                <a:spcPts val="1620"/>
+              </a:lnSpc>
+              <a:spcAft>
+                <a:spcPts val="300"/>
+              </a:spcAft>
+              <a:buNone/>
+            </a:pPr>
+            <a:r>
+              <a:rPr lang="en-US" sz="1200" dirty="0">
+                <a:solidFill>
+                  <a:srgbClr val="2C2C2C"/>
+                </a:solidFill>
+                <a:latin typeface="Verdana" pitchFamily="34" charset="0"/>
+                <a:ea typeface="Verdana" pitchFamily="34" charset="-122"/>
+                <a:cs typeface="Verdana" pitchFamily="34" charset="-120"/>
+              </a:rPr>
+              <a:t> Use only N from 1 to 5. Build up.</a:t>
+            </a:r>
+            <a:endParaRPr lang="en-US" sz="1200" dirty="0"/>
+          </a:p>
+        </p:txBody>
+      </p:sp>
+      <p:sp>
+        <p:nvSpPr>
+          <p:cNvPr id="5" name="Text 3"/>
+          <p:cNvSpPr/>
+          <p:nvPr/>
+        </p:nvSpPr>
+        <p:spPr>
+          <a:xfrm>
+            <a:off x="406301" y="4434929"/>
+            <a:ext cx="8498026" cy="213271"/>
+          </a:xfrm>
+          <a:prstGeom prst="rect">
+            <a:avLst/>
+          </a:prstGeom>
+          <a:noFill/>
+          <a:ln/>
+        </p:spPr>
+        <p:txBody>
+          <a:bodyPr wrap="square" lIns="0" tIns="0" rIns="0" bIns="0" rtlCol="0" anchor="t"/>
+          <a:lstStyle/>
+          <a:p>
+            <a:pPr algn="l" indent="0" marL="0">
+              <a:lnSpc>
+                <a:spcPts val="1680"/>
+              </a:lnSpc>
+              <a:spcBef>
+                <a:spcPts val="300"/>
+              </a:spcBef>
+              <a:spcAft>
+                <a:spcPts val="300"/>
+              </a:spcAft>
+              <a:buNone/>
+            </a:pPr>
+            <a:r>
+              <a:rPr lang="en-US" sz="1200" dirty="0">
+                <a:solidFill>
+                  <a:srgbClr val="2C2C2C"/>
+                </a:solidFill>
+                <a:latin typeface="Verdana" pitchFamily="34" charset="0"/>
+                <a:ea typeface="Verdana" pitchFamily="34" charset="-122"/>
+                <a:cs typeface="Verdana" pitchFamily="34" charset="-120"/>
+              </a:rPr>
+              <a:t>Primary ·  · IKS Curriculum</a:t>
+            </a:r>
+            <a:endParaRPr lang="en-US" sz="1200" dirty="0"/>
+          </a:p>
+        </p:txBody>
+      </p:sp>
+    </p:spTree>
+  </p:cSld>
+  <p:clrMapOvr>
+    <a:masterClrMapping/>
+  </p:clrMapOvr>
+</p:sld>
+</file>
+
+<file path=ppt/slides/slide14.xml><?xml version="1.0" encoding="utf-8"?>
+<p:sld xmlns:a="http://schemas.openxmlformats.org/drawingml/2006/main" xmlns:r="http://schemas.openxmlformats.org/officeDocument/2006/relationships" xmlns:p="http://schemas.openxmlformats.org/presentationml/2006/main">
+  <p:cSld name="Slide 14">
+    <p:bg>
+      <p:bgPr>
+        <a:solidFill>
+          <a:srgbClr val="FAF7F2"/>
+        </a:solidFill>
+      </p:bgPr>
+    </p:bg>
+    <p:spTree>
+      <p:nvGrpSpPr>
+        <p:cNvPr id="1" name=""/>
+        <p:cNvGrpSpPr/>
+        <p:nvPr/>
+      </p:nvGrpSpPr>
+      <p:grpSpPr>
+        <a:xfrm>
+          <a:off x="0" y="0"/>
+          <a:ext cx="0" cy="0"/>
+          <a:chOff x="0" y="0"/>
+          <a:chExt cx="0" cy="0"/>
+        </a:xfrm>
+      </p:grpSpPr>
+      <p:sp>
+        <p:nvSpPr>
+          <p:cNvPr id="2" name="Text 0"/>
+          <p:cNvSpPr/>
+          <p:nvPr/>
+        </p:nvSpPr>
+        <p:spPr>
+          <a:xfrm>
+            <a:off x="0" y="0"/>
+            <a:ext cx="9144000" cy="101501"/>
+          </a:xfrm>
+          <a:prstGeom prst="rect">
+            <a:avLst/>
+          </a:prstGeom>
+          <a:solidFill>
+            <a:srgbClr val="87A96B"/>
+          </a:solidFill>
+          <a:ln/>
+        </p:spPr>
+        <p:txBody>
+          <a:bodyPr wrap="square" rtlCol="0" anchor="ctr"/>
+          <a:lstStyle/>
+          <a:p>
+            <a:pPr indent="0" marL="0">
+              <a:buNone/>
+            </a:pPr>
+            <a:endParaRPr lang="en-US" dirty="0"/>
+          </a:p>
+        </p:txBody>
+      </p:sp>
+      <p:sp>
+        <p:nvSpPr>
+          <p:cNvPr id="3" name="Text 1"/>
+          <p:cNvSpPr/>
+          <p:nvPr/>
+        </p:nvSpPr>
+        <p:spPr>
+          <a:xfrm>
+            <a:off x="406301" y="457051"/>
+            <a:ext cx="8498026" cy="274290"/>
+          </a:xfrm>
+          <a:prstGeom prst="rect">
+            <a:avLst/>
+          </a:prstGeom>
+          <a:noFill/>
+          <a:ln/>
+        </p:spPr>
+        <p:txBody>
+          <a:bodyPr wrap="square" lIns="0" tIns="0" rIns="0" bIns="0" rtlCol="0" anchor="t"/>
+          <a:lstStyle/>
+          <a:p>
+            <a:pPr algn="l" indent="0" marL="0">
+              <a:lnSpc>
+                <a:spcPts val="2160"/>
+              </a:lnSpc>
+              <a:spcBef>
+                <a:spcPts val="600"/>
+              </a:spcBef>
+              <a:spcAft>
+                <a:spcPts val="800"/>
+              </a:spcAft>
+              <a:buNone/>
+            </a:pPr>
+            <a:r>
+              <a:rPr lang="en-US" sz="1800" b="1" dirty="0">
+                <a:solidFill>
+                  <a:srgbClr val="E07A5F"/>
+                </a:solidFill>
+                <a:latin typeface="Georgia" pitchFamily="34" charset="0"/>
+                <a:ea typeface="Georgia" pitchFamily="34" charset="-122"/>
+                <a:cs typeface="Georgia" pitchFamily="34" charset="-120"/>
+              </a:rPr>
               <a:t>Teacher's quick notes</a:t>
             </a:r>
             <a:endParaRPr lang="en-US" sz="1800" dirty="0"/>
@@ -2222,8 +3496,8 @@
         </p:nvSpPr>
         <p:spPr>
           <a:xfrm>
-            <a:off x="406301" y="870942"/>
-            <a:ext cx="8498026" cy="872133"/>
+            <a:off x="634901" y="883593"/>
+            <a:ext cx="8102798" cy="1209377"/>
           </a:xfrm>
           <a:prstGeom prst="rect">
             <a:avLst/>
@@ -2235,17 +3509,15 @@
           <a:bodyPr wrap="square" lIns="0" tIns="0" rIns="0" bIns="0" rtlCol="0" anchor="t"/>
           <a:lstStyle/>
           <a:p>
-            <a:pPr algn="l" indent="0" marL="0">
-              <a:lnSpc>
-                <a:spcPts val="1680"/>
-              </a:lnSpc>
-              <a:spcBef>
-                <a:spcPts val="300"/>
-              </a:spcBef>
-              <a:spcAft>
-                <a:spcPts val="300"/>
-              </a:spcAft>
-              <a:buNone/>
+            <a:pPr algn="l" marL="342900" indent="-342900">
+              <a:lnSpc>
+                <a:spcPts val="1620"/>
+              </a:lnSpc>
+              <a:spcAft>
+                <a:spcPts val="300"/>
+              </a:spcAft>
+              <a:buSzPct val="100000"/>
+              <a:buChar char="•"/>
             </a:pPr>
             <a:r>
               <a:rPr lang="en-US" sz="1200" dirty="0">
@@ -2256,19 +3528,20 @@
                 <a:ea typeface="Verdana" pitchFamily="34" charset="-122"/>
                 <a:cs typeface="Verdana" pitchFamily="34" charset="-120"/>
               </a:rPr>
-              <a:t>– The "9 in front" framing is the key insight. Make sure every child says it. – For N = 0 or N = 10, the bar model is a bit off (no shading, or a whole group gone). Acknowledge and move on; those are edge cases. – Some children will sniff out the pattern: "to do 100 minus any single digit, just write '9' then the friend of that digit." Praise — that IS the Nikhilam rule for </a:t>
-            </a:r>
-            <a:pPr algn="l" indent="0" marL="0">
-              <a:lnSpc>
-                <a:spcPts val="1680"/>
-              </a:lnSpc>
-              <a:spcBef>
-                <a:spcPts val="300"/>
-              </a:spcBef>
-              <a:spcAft>
-                <a:spcPts val="300"/>
-              </a:spcAft>
-              <a:buNone/>
+              <a:t>The "9 in front" framing is the key insight. Make sure every child says it.</a:t>
+            </a:r>
+            <a:endParaRPr lang="en-US" sz="1200" dirty="0"/>
+          </a:p>
+          <a:p>
+            <a:pPr algn="l" marL="342900" indent="-342900">
+              <a:lnSpc>
+                <a:spcPts val="1620"/>
+              </a:lnSpc>
+              <a:spcAft>
+                <a:spcPts val="300"/>
+              </a:spcAft>
+              <a:buSzPct val="100000"/>
+              <a:buChar char="•"/>
             </a:pPr>
             <a:r>
               <a:rPr lang="en-US" sz="1200" dirty="0">
@@ -2279,15 +3552,56 @@
                 <a:ea typeface="Verdana" pitchFamily="34" charset="-122"/>
                 <a:cs typeface="Verdana" pitchFamily="34" charset="-120"/>
               </a:rPr>
+              <a:t>For N = 0 or N = 10, the bar model is a bit off (no shading, or a whole group gone). Acknowledge and move on; those are edge cases.</a:t>
+            </a:r>
+            <a:endParaRPr lang="en-US" sz="1200" dirty="0"/>
+          </a:p>
+          <a:p>
+            <a:pPr algn="l" marL="342900" indent="-342900">
+              <a:lnSpc>
+                <a:spcPts val="1620"/>
+              </a:lnSpc>
+              <a:spcAft>
+                <a:spcPts val="300"/>
+              </a:spcAft>
+              <a:buSzPct val="100000"/>
+              <a:buChar char="•"/>
+            </a:pPr>
+            <a:r>
+              <a:rPr lang="en-US" sz="1200" dirty="0">
+                <a:solidFill>
+                  <a:srgbClr val="2C2C2C"/>
+                </a:solidFill>
+                <a:latin typeface="Verdana" pitchFamily="34" charset="0"/>
+                <a:ea typeface="Verdana" pitchFamily="34" charset="-122"/>
+                <a:cs typeface="Verdana" pitchFamily="34" charset="-120"/>
+              </a:rPr>
+              <a:t>Some children will sniff out the pattern: "to do 100 minus any single digit, just write '9' then the friend of that digit." Praise — that IS the Nikhilam rule for </a:t>
+            </a:r>
+            <a:pPr algn="l" indent="0" marL="0">
+              <a:lnSpc>
+                <a:spcPts val="1620"/>
+              </a:lnSpc>
+              <a:spcAft>
+                <a:spcPts val="300"/>
+              </a:spcAft>
+              <a:buNone/>
+            </a:pPr>
+            <a:r>
+              <a:rPr lang="en-US" sz="1200" dirty="0">
+                <a:solidFill>
+                  <a:srgbClr val="2C2C2C"/>
+                </a:solidFill>
+                <a:latin typeface="Verdana" pitchFamily="34" charset="0"/>
+                <a:ea typeface="Verdana" pitchFamily="34" charset="-122"/>
+                <a:cs typeface="Verdana" pitchFamily="34" charset="-120"/>
+              </a:rPr>
               <a:t>100 − N</a:t>
             </a:r>
             <a:pPr algn="l" indent="0" marL="0">
               <a:lnSpc>
-                <a:spcPts val="1680"/>
-              </a:lnSpc>
-              <a:spcBef>
-                <a:spcPts val="300"/>
-              </a:spcBef>
+                <a:spcPts val="1620"/>
+              </a:lnSpc>
               <a:spcAft>
                 <a:spcPts val="300"/>
               </a:spcAft>
@@ -2460,7 +3774,7 @@
                 <a:ea typeface="Georgia" pitchFamily="34" charset="-122"/>
                 <a:cs typeface="Georgia" pitchFamily="34" charset="-120"/>
               </a:rPr>
-              <a:t>Materials</a:t>
+              <a:t>Goal</a:t>
             </a:r>
             <a:endParaRPr lang="en-US" sz="1800" dirty="0"/>
           </a:p>
@@ -2475,7 +3789,7 @@
         <p:spPr>
           <a:xfrm>
             <a:off x="406301" y="870942"/>
-            <a:ext cx="8498026" cy="426541"/>
+            <a:ext cx="8498026" cy="464641"/>
           </a:xfrm>
           <a:prstGeom prst="rect">
             <a:avLst/>
@@ -2508,7 +3822,99 @@
                 <a:ea typeface="Verdana" pitchFamily="34" charset="-122"/>
                 <a:cs typeface="Verdana" pitchFamily="34" charset="-120"/>
               </a:rPr>
-              <a:t>– Bar-model strips: long printed strips divided into 10 boxes of 10 each (= 100 squares total) – Coloured crayons – Number cards 0–9</a:t>
+              <a:t>Children compute </a:t>
+            </a:r>
+            <a:pPr algn="l" indent="0" marL="0">
+              <a:lnSpc>
+                <a:spcPts val="1680"/>
+              </a:lnSpc>
+              <a:spcBef>
+                <a:spcPts val="300"/>
+              </a:spcBef>
+              <a:spcAft>
+                <a:spcPts val="300"/>
+              </a:spcAft>
+              <a:buNone/>
+            </a:pPr>
+            <a:r>
+              <a:rPr lang="en-US" sz="1200" dirty="0">
+                <a:solidFill>
+                  <a:srgbClr val="2C2C2C"/>
+                </a:solidFill>
+                <a:latin typeface="Verdana" pitchFamily="34" charset="0"/>
+                <a:ea typeface="Verdana" pitchFamily="34" charset="-122"/>
+                <a:cs typeface="Verdana" pitchFamily="34" charset="-120"/>
+              </a:rPr>
+              <a:t>100 − N</a:t>
+            </a:r>
+            <a:pPr algn="l" indent="0" marL="0">
+              <a:lnSpc>
+                <a:spcPts val="1680"/>
+              </a:lnSpc>
+              <a:spcBef>
+                <a:spcPts val="300"/>
+              </a:spcBef>
+              <a:spcAft>
+                <a:spcPts val="300"/>
+              </a:spcAft>
+              <a:buNone/>
+            </a:pPr>
+            <a:r>
+              <a:rPr lang="en-US" sz="1200" dirty="0">
+                <a:solidFill>
+                  <a:srgbClr val="2C2C2C"/>
+                </a:solidFill>
+                <a:latin typeface="Verdana" pitchFamily="34" charset="0"/>
+                <a:ea typeface="Verdana" pitchFamily="34" charset="-122"/>
+                <a:cs typeface="Verdana" pitchFamily="34" charset="-120"/>
+              </a:rPr>
+              <a:t> for single-digit N using "friends to ten" and a bar model. By end of class: </a:t>
+            </a:r>
+            <a:pPr algn="l" indent="0" marL="0">
+              <a:lnSpc>
+                <a:spcPts val="1680"/>
+              </a:lnSpc>
+              <a:spcBef>
+                <a:spcPts val="300"/>
+              </a:spcBef>
+              <a:spcAft>
+                <a:spcPts val="300"/>
+              </a:spcAft>
+              <a:buNone/>
+            </a:pPr>
+            <a:r>
+              <a:rPr lang="en-US" sz="1200" dirty="0">
+                <a:solidFill>
+                  <a:srgbClr val="2C2C2C"/>
+                </a:solidFill>
+                <a:latin typeface="Verdana" pitchFamily="34" charset="0"/>
+                <a:ea typeface="Verdana" pitchFamily="34" charset="-122"/>
+                <a:cs typeface="Verdana" pitchFamily="34" charset="-120"/>
+              </a:rPr>
+              <a:t>100 − 7 = 93</a:t>
+            </a:r>
+            <a:pPr algn="l" indent="0" marL="0">
+              <a:lnSpc>
+                <a:spcPts val="1680"/>
+              </a:lnSpc>
+              <a:spcBef>
+                <a:spcPts val="300"/>
+              </a:spcBef>
+              <a:spcAft>
+                <a:spcPts val="300"/>
+              </a:spcAft>
+              <a:buNone/>
+            </a:pPr>
+            <a:r>
+              <a:rPr lang="en-US" sz="1200" dirty="0">
+                <a:solidFill>
+                  <a:srgbClr val="2C2C2C"/>
+                </a:solidFill>
+                <a:latin typeface="Verdana" pitchFamily="34" charset="0"/>
+                <a:ea typeface="Verdana" pitchFamily="34" charset="-122"/>
+                <a:cs typeface="Verdana" pitchFamily="34" charset="-120"/>
+              </a:rPr>
+              <a:t>, instantly.</a:t>
             </a:r>
             <a:endParaRPr lang="en-US" sz="1200" dirty="0"/>
           </a:p>
@@ -2666,7 +4072,7 @@
                 <a:ea typeface="Georgia" pitchFamily="34" charset="-122"/>
                 <a:cs typeface="Georgia" pitchFamily="34" charset="-120"/>
               </a:rPr>
-              <a:t>The flow</a:t>
+              <a:t>Materials</a:t>
             </a:r>
             <a:endParaRPr lang="en-US" sz="1800" dirty="0"/>
           </a:p>
@@ -2675,6 +4081,100 @@
       <p:sp>
         <p:nvSpPr>
           <p:cNvPr id="4" name="Text 2"/>
+          <p:cNvSpPr/>
+          <p:nvPr/>
+        </p:nvSpPr>
+        <p:spPr>
+          <a:xfrm>
+            <a:off x="634901" y="883593"/>
+            <a:ext cx="8102798" cy="769441"/>
+          </a:xfrm>
+          <a:prstGeom prst="rect">
+            <a:avLst/>
+          </a:prstGeom>
+          <a:noFill/>
+          <a:ln/>
+        </p:spPr>
+        <p:txBody>
+          <a:bodyPr wrap="square" lIns="0" tIns="0" rIns="0" bIns="0" rtlCol="0" anchor="t"/>
+          <a:lstStyle/>
+          <a:p>
+            <a:pPr algn="l" marL="342900" indent="-342900">
+              <a:lnSpc>
+                <a:spcPts val="1620"/>
+              </a:lnSpc>
+              <a:spcAft>
+                <a:spcPts val="300"/>
+              </a:spcAft>
+              <a:buSzPct val="100000"/>
+              <a:buChar char="•"/>
+            </a:pPr>
+            <a:r>
+              <a:rPr lang="en-US" sz="1200" dirty="0">
+                <a:solidFill>
+                  <a:srgbClr val="2C2C2C"/>
+                </a:solidFill>
+                <a:latin typeface="Verdana" pitchFamily="34" charset="0"/>
+                <a:ea typeface="Verdana" pitchFamily="34" charset="-122"/>
+                <a:cs typeface="Verdana" pitchFamily="34" charset="-120"/>
+              </a:rPr>
+              <a:t>Bar-model strips: long printed strips divided into 10 boxes of 10 each (= 100 squares total)</a:t>
+            </a:r>
+            <a:endParaRPr lang="en-US" sz="1200" dirty="0"/>
+          </a:p>
+          <a:p>
+            <a:pPr algn="l" marL="342900" indent="-342900">
+              <a:lnSpc>
+                <a:spcPts val="1620"/>
+              </a:lnSpc>
+              <a:spcAft>
+                <a:spcPts val="300"/>
+              </a:spcAft>
+              <a:buSzPct val="100000"/>
+              <a:buChar char="•"/>
+            </a:pPr>
+            <a:r>
+              <a:rPr lang="en-US" sz="1200" dirty="0">
+                <a:solidFill>
+                  <a:srgbClr val="2C2C2C"/>
+                </a:solidFill>
+                <a:latin typeface="Verdana" pitchFamily="34" charset="0"/>
+                <a:ea typeface="Verdana" pitchFamily="34" charset="-122"/>
+                <a:cs typeface="Verdana" pitchFamily="34" charset="-120"/>
+              </a:rPr>
+              <a:t>Coloured crayons</a:t>
+            </a:r>
+            <a:endParaRPr lang="en-US" sz="1200" dirty="0"/>
+          </a:p>
+          <a:p>
+            <a:pPr algn="l" marL="342900" indent="-342900">
+              <a:lnSpc>
+                <a:spcPts val="1620"/>
+              </a:lnSpc>
+              <a:spcAft>
+                <a:spcPts val="300"/>
+              </a:spcAft>
+              <a:buSzPct val="100000"/>
+              <a:buChar char="•"/>
+            </a:pPr>
+            <a:r>
+              <a:rPr lang="en-US" sz="1200" dirty="0">
+                <a:solidFill>
+                  <a:srgbClr val="2C2C2C"/>
+                </a:solidFill>
+                <a:latin typeface="Verdana" pitchFamily="34" charset="0"/>
+                <a:ea typeface="Verdana" pitchFamily="34" charset="-122"/>
+                <a:cs typeface="Verdana" pitchFamily="34" charset="-120"/>
+              </a:rPr>
+              <a:t>Number cards 0–9</a:t>
+            </a:r>
+            <a:endParaRPr lang="en-US" sz="1200" dirty="0"/>
+          </a:p>
+        </p:txBody>
+      </p:sp>
+      <p:sp>
+        <p:nvSpPr>
+          <p:cNvPr id="5" name="Text 3"/>
           <p:cNvSpPr/>
           <p:nvPr/>
         </p:nvSpPr>
@@ -2824,7 +4324,7 @@
                 <a:ea typeface="Georgia" pitchFamily="34" charset="-122"/>
                 <a:cs typeface="Georgia" pitchFamily="34" charset="-120"/>
               </a:rPr>
-              <a:t>Settle + chant (5 min)</a:t>
+              <a:t>The flow</a:t>
             </a:r>
             <a:endParaRPr lang="en-US" sz="1800" dirty="0"/>
           </a:p>
@@ -2833,100 +4333,6 @@
       <p:sp>
         <p:nvSpPr>
           <p:cNvPr id="4" name="Text 2"/>
-          <p:cNvSpPr/>
-          <p:nvPr/>
-        </p:nvSpPr>
-        <p:spPr>
-          <a:xfrm>
-            <a:off x="406301" y="870942"/>
-            <a:ext cx="8498026" cy="213271"/>
-          </a:xfrm>
-          <a:prstGeom prst="rect">
-            <a:avLst/>
-          </a:prstGeom>
-          <a:noFill/>
-          <a:ln/>
-        </p:spPr>
-        <p:txBody>
-          <a:bodyPr wrap="square" lIns="0" tIns="0" rIns="0" bIns="0" rtlCol="0" anchor="t"/>
-          <a:lstStyle/>
-          <a:p>
-            <a:pPr algn="l" indent="0" marL="0">
-              <a:lnSpc>
-                <a:spcPts val="1680"/>
-              </a:lnSpc>
-              <a:spcBef>
-                <a:spcPts val="300"/>
-              </a:spcBef>
-              <a:spcAft>
-                <a:spcPts val="300"/>
-              </a:spcAft>
-              <a:buNone/>
-            </a:pPr>
-            <a:r>
-              <a:rPr lang="en-US" sz="1200" dirty="0">
-                <a:solidFill>
-                  <a:srgbClr val="2C2C2C"/>
-                </a:solidFill>
-                <a:latin typeface="Verdana" pitchFamily="34" charset="0"/>
-                <a:ea typeface="Verdana" pitchFamily="34" charset="-122"/>
-                <a:cs typeface="Verdana" pitchFamily="34" charset="-120"/>
-              </a:rPr>
-              <a:t>The friends-to-ten chant. A new line: "</a:t>
-            </a:r>
-            <a:pPr algn="l" indent="0" marL="0">
-              <a:lnSpc>
-                <a:spcPts val="1680"/>
-              </a:lnSpc>
-              <a:spcBef>
-                <a:spcPts val="300"/>
-              </a:spcBef>
-              <a:spcAft>
-                <a:spcPts val="300"/>
-              </a:spcAft>
-              <a:buNone/>
-            </a:pPr>
-            <a:r>
-              <a:rPr lang="en-US" sz="1200" i="1" dirty="0">
-                <a:solidFill>
-                  <a:srgbClr val="2C2C2C"/>
-                </a:solidFill>
-                <a:latin typeface="Verdana" pitchFamily="34" charset="0"/>
-                <a:ea typeface="Verdana" pitchFamily="34" charset="-122"/>
-                <a:cs typeface="Verdana" pitchFamily="34" charset="-120"/>
-              </a:rPr>
-              <a:t>And TEN tens make ONE HUNDRED!</a:t>
-            </a:r>
-            <a:pPr algn="l" indent="0" marL="0">
-              <a:lnSpc>
-                <a:spcPts val="1680"/>
-              </a:lnSpc>
-              <a:spcBef>
-                <a:spcPts val="300"/>
-              </a:spcBef>
-              <a:spcAft>
-                <a:spcPts val="300"/>
-              </a:spcAft>
-              <a:buNone/>
-            </a:pPr>
-            <a:r>
-              <a:rPr lang="en-US" sz="1200" dirty="0">
-                <a:solidFill>
-                  <a:srgbClr val="2C2C2C"/>
-                </a:solidFill>
-                <a:latin typeface="Verdana" pitchFamily="34" charset="0"/>
-                <a:ea typeface="Verdana" pitchFamily="34" charset="-122"/>
-                <a:cs typeface="Verdana" pitchFamily="34" charset="-120"/>
-              </a:rPr>
-              <a:t>"</a:t>
-            </a:r>
-            <a:endParaRPr lang="en-US" sz="1200" dirty="0"/>
-          </a:p>
-        </p:txBody>
-      </p:sp>
-      <p:sp>
-        <p:nvSpPr>
-          <p:cNvPr id="5" name="Text 3"/>
           <p:cNvSpPr/>
           <p:nvPr/>
         </p:nvSpPr>
@@ -3076,7 +4482,7 @@
                 <a:ea typeface="Georgia" pitchFamily="34" charset="-122"/>
                 <a:cs typeface="Georgia" pitchFamily="34" charset="-120"/>
               </a:rPr>
-              <a:t>Bar-model demo (10 min)</a:t>
+              <a:t>Settle + chant (5 min)</a:t>
             </a:r>
             <a:endParaRPr lang="en-US" sz="1800" dirty="0"/>
           </a:p>
@@ -3124,7 +4530,53 @@
                 <a:ea typeface="Verdana" pitchFamily="34" charset="-122"/>
                 <a:cs typeface="Verdana" pitchFamily="34" charset="-120"/>
               </a:rPr>
-              <a:t>Draw a big bar on the board (or use the strip). Mark off 10 sections of 10 each. Total: 100.</a:t>
+              <a:t>The friends-to-ten chant. A new line: "</a:t>
+            </a:r>
+            <a:pPr algn="l" indent="0" marL="0">
+              <a:lnSpc>
+                <a:spcPts val="1680"/>
+              </a:lnSpc>
+              <a:spcBef>
+                <a:spcPts val="300"/>
+              </a:spcBef>
+              <a:spcAft>
+                <a:spcPts val="300"/>
+              </a:spcAft>
+              <a:buNone/>
+            </a:pPr>
+            <a:r>
+              <a:rPr lang="en-US" sz="1200" i="1" dirty="0">
+                <a:solidFill>
+                  <a:srgbClr val="2C2C2C"/>
+                </a:solidFill>
+                <a:latin typeface="Verdana" pitchFamily="34" charset="0"/>
+                <a:ea typeface="Verdana" pitchFamily="34" charset="-122"/>
+                <a:cs typeface="Verdana" pitchFamily="34" charset="-120"/>
+              </a:rPr>
+              <a:t>And TEN tens make ONE HUNDRED!</a:t>
+            </a:r>
+            <a:pPr algn="l" indent="0" marL="0">
+              <a:lnSpc>
+                <a:spcPts val="1680"/>
+              </a:lnSpc>
+              <a:spcBef>
+                <a:spcPts val="300"/>
+              </a:spcBef>
+              <a:spcAft>
+                <a:spcPts val="300"/>
+              </a:spcAft>
+              <a:buNone/>
+            </a:pPr>
+            <a:r>
+              <a:rPr lang="en-US" sz="1200" dirty="0">
+                <a:solidFill>
+                  <a:srgbClr val="2C2C2C"/>
+                </a:solidFill>
+                <a:latin typeface="Verdana" pitchFamily="34" charset="0"/>
+                <a:ea typeface="Verdana" pitchFamily="34" charset="-122"/>
+                <a:cs typeface="Verdana" pitchFamily="34" charset="-120"/>
+              </a:rPr>
+              <a:t>"</a:t>
             </a:r>
             <a:endParaRPr lang="en-US" sz="1200" dirty="0"/>
           </a:p>
@@ -3138,789 +4590,7 @@
         </p:nvSpPr>
         <p:spPr>
           <a:xfrm>
-            <a:off x="406301" y="1160413"/>
-            <a:ext cx="8498026" cy="213271"/>
-          </a:xfrm>
-          <a:prstGeom prst="rect">
-            <a:avLst/>
-          </a:prstGeom>
-          <a:noFill/>
-          <a:ln/>
-        </p:spPr>
-        <p:txBody>
-          <a:bodyPr wrap="square" lIns="0" tIns="0" rIns="0" bIns="0" rtlCol="0" anchor="t"/>
-          <a:lstStyle/>
-          <a:p>
-            <a:pPr algn="l" indent="0" marL="0">
-              <a:lnSpc>
-                <a:spcPts val="1680"/>
-              </a:lnSpc>
-              <a:spcBef>
-                <a:spcPts val="300"/>
-              </a:spcBef>
-              <a:spcAft>
-                <a:spcPts val="300"/>
-              </a:spcAft>
-              <a:buNone/>
-            </a:pPr>
-            <a:r>
-              <a:rPr lang="en-US" sz="1200" dirty="0">
-                <a:solidFill>
-                  <a:srgbClr val="2C2C2C"/>
-                </a:solidFill>
-                <a:latin typeface="Verdana" pitchFamily="34" charset="0"/>
-                <a:ea typeface="Verdana" pitchFamily="34" charset="-122"/>
-                <a:cs typeface="Verdana" pitchFamily="34" charset="-120"/>
-              </a:rPr>
-              <a:t>Teacher: </a:t>
-            </a:r>
-            <a:pPr algn="l" indent="0" marL="0">
-              <a:lnSpc>
-                <a:spcPts val="1680"/>
-              </a:lnSpc>
-              <a:spcBef>
-                <a:spcPts val="300"/>
-              </a:spcBef>
-              <a:spcAft>
-                <a:spcPts val="300"/>
-              </a:spcAft>
-              <a:buNone/>
-            </a:pPr>
-            <a:r>
-              <a:rPr lang="en-US" sz="1200" i="1" dirty="0">
-                <a:solidFill>
-                  <a:srgbClr val="2C2C2C"/>
-                </a:solidFill>
-                <a:latin typeface="Verdana" pitchFamily="34" charset="0"/>
-                <a:ea typeface="Verdana" pitchFamily="34" charset="-122"/>
-                <a:cs typeface="Verdana" pitchFamily="34" charset="-120"/>
-              </a:rPr>
-              <a:t>"100 ants on a hundred leaves. 7 ants walk off. How many left?"</a:t>
-            </a:r>
-            <a:endParaRPr lang="en-US" sz="1200" dirty="0"/>
-          </a:p>
-        </p:txBody>
-      </p:sp>
-      <p:sp>
-        <p:nvSpPr>
-          <p:cNvPr id="6" name="Text 4"/>
-          <p:cNvSpPr/>
-          <p:nvPr/>
-        </p:nvSpPr>
-        <p:spPr>
-          <a:xfrm>
-            <a:off x="406301" y="1449884"/>
-            <a:ext cx="8498026" cy="213271"/>
-          </a:xfrm>
-          <a:prstGeom prst="rect">
-            <a:avLst/>
-          </a:prstGeom>
-          <a:noFill/>
-          <a:ln/>
-        </p:spPr>
-        <p:txBody>
-          <a:bodyPr wrap="square" lIns="0" tIns="0" rIns="0" bIns="0" rtlCol="0" anchor="t"/>
-          <a:lstStyle/>
-          <a:p>
-            <a:pPr algn="l" indent="0" marL="0">
-              <a:lnSpc>
-                <a:spcPts val="1680"/>
-              </a:lnSpc>
-              <a:spcBef>
-                <a:spcPts val="300"/>
-              </a:spcBef>
-              <a:spcAft>
-                <a:spcPts val="300"/>
-              </a:spcAft>
-              <a:buNone/>
-            </a:pPr>
-            <a:r>
-              <a:rPr lang="en-US" sz="1200" dirty="0">
-                <a:solidFill>
-                  <a:srgbClr val="2C2C2C"/>
-                </a:solidFill>
-                <a:latin typeface="Verdana" pitchFamily="34" charset="0"/>
-                <a:ea typeface="Verdana" pitchFamily="34" charset="-122"/>
-                <a:cs typeface="Verdana" pitchFamily="34" charset="-120"/>
-              </a:rPr>
-              <a:t>Cross off 7 squares from the rightmost group. </a:t>
-            </a:r>
-            <a:pPr algn="l" indent="0" marL="0">
-              <a:lnSpc>
-                <a:spcPts val="1680"/>
-              </a:lnSpc>
-              <a:spcBef>
-                <a:spcPts val="300"/>
-              </a:spcBef>
-              <a:spcAft>
-                <a:spcPts val="300"/>
-              </a:spcAft>
-              <a:buNone/>
-            </a:pPr>
-            <a:r>
-              <a:rPr lang="en-US" sz="1200" i="1" dirty="0">
-                <a:solidFill>
-                  <a:srgbClr val="2C2C2C"/>
-                </a:solidFill>
-                <a:latin typeface="Verdana" pitchFamily="34" charset="0"/>
-                <a:ea typeface="Verdana" pitchFamily="34" charset="-122"/>
-                <a:cs typeface="Verdana" pitchFamily="34" charset="-120"/>
-              </a:rPr>
-              <a:t>"This last group used to be 10. Now it's 3."</a:t>
-            </a:r>
-            <a:endParaRPr lang="en-US" sz="1200" dirty="0"/>
-          </a:p>
-        </p:txBody>
-      </p:sp>
-      <p:sp>
-        <p:nvSpPr>
-          <p:cNvPr id="7" name="Text 5"/>
-          <p:cNvSpPr/>
-          <p:nvPr/>
-        </p:nvSpPr>
-        <p:spPr>
-          <a:xfrm>
-            <a:off x="406301" y="1739354"/>
-            <a:ext cx="8498026" cy="213271"/>
-          </a:xfrm>
-          <a:prstGeom prst="rect">
-            <a:avLst/>
-          </a:prstGeom>
-          <a:noFill/>
-          <a:ln/>
-        </p:spPr>
-        <p:txBody>
-          <a:bodyPr wrap="square" lIns="0" tIns="0" rIns="0" bIns="0" rtlCol="0" anchor="t"/>
-          <a:lstStyle/>
-          <a:p>
-            <a:pPr algn="l" indent="0" marL="0">
-              <a:lnSpc>
-                <a:spcPts val="1680"/>
-              </a:lnSpc>
-              <a:spcBef>
-                <a:spcPts val="300"/>
-              </a:spcBef>
-              <a:spcAft>
-                <a:spcPts val="300"/>
-              </a:spcAft>
-              <a:buNone/>
-            </a:pPr>
-            <a:r>
-              <a:rPr lang="en-US" sz="1200" i="1" dirty="0">
-                <a:solidFill>
-                  <a:srgbClr val="2C2C2C"/>
-                </a:solidFill>
-                <a:latin typeface="Verdana" pitchFamily="34" charset="0"/>
-                <a:ea typeface="Verdana" pitchFamily="34" charset="-122"/>
-                <a:cs typeface="Verdana" pitchFamily="34" charset="-120"/>
-              </a:rPr>
-              <a:t>"How many groups of 10 still left? NINE groups. Plus the 3 leftover ants. So 90 + 3 = 93."</a:t>
-            </a:r>
-            <a:endParaRPr lang="en-US" sz="1200" dirty="0"/>
-          </a:p>
-        </p:txBody>
-      </p:sp>
-      <p:sp>
-        <p:nvSpPr>
-          <p:cNvPr id="8" name="Text 6"/>
-          <p:cNvSpPr/>
-          <p:nvPr/>
-        </p:nvSpPr>
-        <p:spPr>
-          <a:xfrm>
-            <a:off x="406301" y="2041475"/>
-            <a:ext cx="8331398" cy="900113"/>
-          </a:xfrm>
-          <a:prstGeom prst="rect">
-            <a:avLst/>
-          </a:prstGeom>
-          <a:solidFill>
-            <a:srgbClr val="FFFFFF"/>
-          </a:solidFill>
-          <a:ln/>
-        </p:spPr>
-        <p:txBody>
-          <a:bodyPr wrap="square" rtlCol="0" anchor="ctr"/>
-          <a:lstStyle/>
-          <a:p>
-            <a:pPr indent="0" marL="0">
-              <a:buNone/>
-            </a:pPr>
-            <a:endParaRPr lang="en-US" dirty="0"/>
-          </a:p>
-        </p:txBody>
-      </p:sp>
-      <p:sp>
-        <p:nvSpPr>
-          <p:cNvPr id="9" name="Shape 7"/>
-          <p:cNvSpPr/>
-          <p:nvPr/>
-        </p:nvSpPr>
-        <p:spPr>
-          <a:xfrm>
-            <a:off x="434876" y="2041475"/>
-            <a:ext cx="0" cy="900113"/>
-          </a:xfrm>
-          <a:prstGeom prst="line">
-            <a:avLst/>
-          </a:prstGeom>
-          <a:noFill/>
-          <a:ln w="57150">
-            <a:solidFill>
-              <a:srgbClr val="E07A5F"/>
-            </a:solidFill>
-            <a:prstDash val="solid"/>
-          </a:ln>
-        </p:spPr>
-      </p:sp>
-      <p:sp>
-        <p:nvSpPr>
-          <p:cNvPr id="10" name="Text 8"/>
-          <p:cNvSpPr/>
-          <p:nvPr/>
-        </p:nvSpPr>
-        <p:spPr>
-          <a:xfrm>
-            <a:off x="692051" y="2231975"/>
-            <a:ext cx="7973389" cy="230981"/>
-          </a:xfrm>
-          <a:prstGeom prst="rect">
-            <a:avLst/>
-          </a:prstGeom>
-          <a:noFill/>
-          <a:ln/>
-        </p:spPr>
-        <p:txBody>
-          <a:bodyPr wrap="square" lIns="0" tIns="0" rIns="0" bIns="0" rtlCol="0" anchor="t"/>
-          <a:lstStyle/>
-          <a:p>
-            <a:pPr algn="l" indent="0" marL="0">
-              <a:lnSpc>
-                <a:spcPts val="1820"/>
-              </a:lnSpc>
-              <a:spcBef>
-                <a:spcPts val="300"/>
-              </a:spcBef>
-              <a:spcAft>
-                <a:spcPts val="300"/>
-              </a:spcAft>
-              <a:buNone/>
-            </a:pPr>
-            <a:r>
-              <a:rPr lang="en-US" sz="1300" b="1" i="1" dirty="0">
-                <a:solidFill>
-                  <a:srgbClr val="2C2C2C"/>
-                </a:solidFill>
-                <a:latin typeface="Georgia" pitchFamily="34" charset="0"/>
-                <a:ea typeface="Georgia" pitchFamily="34" charset="-122"/>
-                <a:cs typeface="Georgia" pitchFamily="34" charset="-120"/>
-              </a:rPr>
-              <a:t>The trick:</a:t>
-            </a:r>
-            <a:pPr algn="l" indent="0" marL="0">
-              <a:lnSpc>
-                <a:spcPts val="1820"/>
-              </a:lnSpc>
-              <a:spcBef>
-                <a:spcPts val="300"/>
-              </a:spcBef>
-              <a:spcAft>
-                <a:spcPts val="300"/>
-              </a:spcAft>
-              <a:buNone/>
-            </a:pPr>
-            <a:r>
-              <a:rPr lang="en-US" sz="1300" dirty="0">
-                <a:solidFill>
-                  <a:srgbClr val="2C2C2C"/>
-                </a:solidFill>
-                <a:latin typeface="Georgia" pitchFamily="34" charset="0"/>
-                <a:ea typeface="Georgia" pitchFamily="34" charset="-122"/>
-                <a:cs typeface="Georgia" pitchFamily="34" charset="-120"/>
-              </a:rPr>
-              <a:t> 7's friend is 3 (10 minus 7 = 3). And there are 9 groups of 10 still standing.</a:t>
-            </a:r>
-            <a:endParaRPr lang="en-US" sz="1300" dirty="0"/>
-          </a:p>
-        </p:txBody>
-      </p:sp>
-      <p:sp>
-        <p:nvSpPr>
-          <p:cNvPr id="11" name="Text 9"/>
-          <p:cNvSpPr/>
-          <p:nvPr/>
-        </p:nvSpPr>
-        <p:spPr>
-          <a:xfrm>
-            <a:off x="692051" y="2501057"/>
-            <a:ext cx="7973389" cy="250031"/>
-          </a:xfrm>
-          <a:prstGeom prst="rect">
-            <a:avLst/>
-          </a:prstGeom>
-          <a:noFill/>
-          <a:ln/>
-        </p:spPr>
-        <p:txBody>
-          <a:bodyPr wrap="square" lIns="0" tIns="0" rIns="0" bIns="0" rtlCol="0" anchor="t"/>
-          <a:lstStyle/>
-          <a:p>
-            <a:pPr algn="l" indent="0" marL="0">
-              <a:lnSpc>
-                <a:spcPts val="1820"/>
-              </a:lnSpc>
-              <a:spcBef>
-                <a:spcPts val="300"/>
-              </a:spcBef>
-              <a:spcAft>
-                <a:spcPts val="300"/>
-              </a:spcAft>
-              <a:buNone/>
-            </a:pPr>
-            <a:r>
-              <a:rPr lang="en-US" sz="1300" dirty="0">
-                <a:solidFill>
-                  <a:srgbClr val="2C2C2C"/>
-                </a:solidFill>
-                <a:latin typeface="Georgia" pitchFamily="34" charset="0"/>
-                <a:ea typeface="Georgia" pitchFamily="34" charset="-122"/>
-                <a:cs typeface="Georgia" pitchFamily="34" charset="-120"/>
-              </a:rPr>
-              <a:t>So </a:t>
-            </a:r>
-            <a:pPr algn="l" indent="0" marL="0">
-              <a:lnSpc>
-                <a:spcPts val="1820"/>
-              </a:lnSpc>
-              <a:spcBef>
-                <a:spcPts val="300"/>
-              </a:spcBef>
-              <a:spcAft>
-                <a:spcPts val="300"/>
-              </a:spcAft>
-              <a:buNone/>
-            </a:pPr>
-            <a:r>
-              <a:rPr lang="en-US" sz="1300" i="1" dirty="0">
-                <a:solidFill>
-                  <a:srgbClr val="2C2C2C"/>
-                </a:solidFill>
-                <a:latin typeface="Georgia" pitchFamily="34" charset="0"/>
-                <a:ea typeface="Georgia" pitchFamily="34" charset="-122"/>
-                <a:cs typeface="Georgia" pitchFamily="34" charset="-120"/>
-              </a:rPr>
-              <a:t>100 − 7 = 93</a:t>
-            </a:r>
-            <a:pPr algn="l" indent="0" marL="0">
-              <a:lnSpc>
-                <a:spcPts val="1820"/>
-              </a:lnSpc>
-              <a:spcBef>
-                <a:spcPts val="300"/>
-              </a:spcBef>
-              <a:spcAft>
-                <a:spcPts val="300"/>
-              </a:spcAft>
-              <a:buNone/>
-            </a:pPr>
-            <a:r>
-              <a:rPr lang="en-US" sz="1300" dirty="0">
-                <a:solidFill>
-                  <a:srgbClr val="2C2C2C"/>
-                </a:solidFill>
-                <a:latin typeface="Georgia" pitchFamily="34" charset="0"/>
-                <a:ea typeface="Georgia" pitchFamily="34" charset="-122"/>
-                <a:cs typeface="Georgia" pitchFamily="34" charset="-120"/>
-              </a:rPr>
-              <a:t>.</a:t>
-            </a:r>
-            <a:endParaRPr lang="en-US" sz="1300" dirty="0"/>
-          </a:p>
-        </p:txBody>
-      </p:sp>
-      <p:sp>
-        <p:nvSpPr>
-          <p:cNvPr id="12" name="Text 10"/>
-          <p:cNvSpPr/>
-          <p:nvPr/>
-        </p:nvSpPr>
-        <p:spPr>
-          <a:xfrm>
-            <a:off x="406301" y="3030438"/>
-            <a:ext cx="8498026" cy="213271"/>
-          </a:xfrm>
-          <a:prstGeom prst="rect">
-            <a:avLst/>
-          </a:prstGeom>
-          <a:noFill/>
-          <a:ln/>
-        </p:spPr>
-        <p:txBody>
-          <a:bodyPr wrap="square" lIns="0" tIns="0" rIns="0" bIns="0" rtlCol="0" anchor="t"/>
-          <a:lstStyle/>
-          <a:p>
-            <a:pPr algn="l" indent="0" marL="0">
-              <a:lnSpc>
-                <a:spcPts val="1680"/>
-              </a:lnSpc>
-              <a:spcBef>
-                <a:spcPts val="300"/>
-              </a:spcBef>
-              <a:spcAft>
-                <a:spcPts val="300"/>
-              </a:spcAft>
-              <a:buNone/>
-            </a:pPr>
-            <a:r>
-              <a:rPr lang="en-US" sz="1200" dirty="0">
-                <a:solidFill>
-                  <a:srgbClr val="2C2C2C"/>
-                </a:solidFill>
-                <a:latin typeface="Verdana" pitchFamily="34" charset="0"/>
-                <a:ea typeface="Verdana" pitchFamily="34" charset="-122"/>
-                <a:cs typeface="Verdana" pitchFamily="34" charset="-120"/>
-              </a:rPr>
-              <a:t>Demo 3 more, with class predicting:</a:t>
-            </a:r>
-            <a:endParaRPr lang="en-US" sz="1200" dirty="0"/>
-          </a:p>
-        </p:txBody>
-      </p:sp>
-      <p:sp>
-        <p:nvSpPr>
-          <p:cNvPr id="13" name="Text 11"/>
-          <p:cNvSpPr/>
-          <p:nvPr/>
-        </p:nvSpPr>
-        <p:spPr>
-          <a:xfrm>
-            <a:off x="406301" y="3319909"/>
-            <a:ext cx="8498026" cy="213271"/>
-          </a:xfrm>
-          <a:prstGeom prst="rect">
-            <a:avLst/>
-          </a:prstGeom>
-          <a:noFill/>
-          <a:ln/>
-        </p:spPr>
-        <p:txBody>
-          <a:bodyPr wrap="square" lIns="0" tIns="0" rIns="0" bIns="0" rtlCol="0" anchor="t"/>
-          <a:lstStyle/>
-          <a:p>
-            <a:pPr algn="l" indent="0" marL="0">
-              <a:lnSpc>
-                <a:spcPts val="1680"/>
-              </a:lnSpc>
-              <a:spcBef>
-                <a:spcPts val="300"/>
-              </a:spcBef>
-              <a:spcAft>
-                <a:spcPts val="300"/>
-              </a:spcAft>
-              <a:buNone/>
-            </a:pPr>
-            <a:r>
-              <a:rPr lang="en-US" sz="1200" i="1" dirty="0">
-                <a:solidFill>
-                  <a:srgbClr val="2C2C2C"/>
-                </a:solidFill>
-                <a:latin typeface="Verdana" pitchFamily="34" charset="0"/>
-                <a:ea typeface="Verdana" pitchFamily="34" charset="-122"/>
-                <a:cs typeface="Verdana" pitchFamily="34" charset="-120"/>
-              </a:rPr>
-              <a:t>Each row: Problem · Friend of N · 9 in front · Answer.</a:t>
-            </a:r>
-            <a:endParaRPr lang="en-US" sz="1200" dirty="0"/>
-          </a:p>
-        </p:txBody>
-      </p:sp>
-      <p:sp>
-        <p:nvSpPr>
-          <p:cNvPr id="14" name="Text 12"/>
-          <p:cNvSpPr/>
-          <p:nvPr/>
-        </p:nvSpPr>
-        <p:spPr>
-          <a:xfrm>
-            <a:off x="634901" y="3622030"/>
-            <a:ext cx="8102798" cy="1013222"/>
-          </a:xfrm>
-          <a:prstGeom prst="rect">
-            <a:avLst/>
-          </a:prstGeom>
-          <a:noFill/>
-          <a:ln/>
-        </p:spPr>
-        <p:txBody>
-          <a:bodyPr wrap="square" lIns="0" tIns="0" rIns="0" bIns="0" rtlCol="0" anchor="t"/>
-          <a:lstStyle/>
-          <a:p>
-            <a:pPr algn="l" marL="342900" indent="-342900">
-              <a:lnSpc>
-                <a:spcPts val="1620"/>
-              </a:lnSpc>
-              <a:spcAft>
-                <a:spcPts val="300"/>
-              </a:spcAft>
-              <a:buSzPct val="100000"/>
-              <a:buChar char="•"/>
-            </a:pPr>
-            <a:r>
-              <a:rPr lang="en-US" sz="1200" b="1" dirty="0">
-                <a:solidFill>
-                  <a:srgbClr val="2C2C2C"/>
-                </a:solidFill>
-                <a:latin typeface="Verdana" pitchFamily="34" charset="0"/>
-                <a:ea typeface="Verdana" pitchFamily="34" charset="-122"/>
-                <a:cs typeface="Verdana" pitchFamily="34" charset="-120"/>
-              </a:rPr>
-              <a:t>100 − 4</a:t>
-            </a:r>
-            <a:pPr algn="l" indent="0" marL="0">
-              <a:lnSpc>
-                <a:spcPts val="1620"/>
-              </a:lnSpc>
-              <a:spcAft>
-                <a:spcPts val="300"/>
-              </a:spcAft>
-              <a:buNone/>
-            </a:pPr>
-            <a:r>
-              <a:rPr lang="en-US" sz="1200" dirty="0">
-                <a:solidFill>
-                  <a:srgbClr val="2C2C2C"/>
-                </a:solidFill>
-                <a:latin typeface="Verdana" pitchFamily="34" charset="0"/>
-                <a:ea typeface="Verdana" pitchFamily="34" charset="-122"/>
-                <a:cs typeface="Verdana" pitchFamily="34" charset="-120"/>
-              </a:rPr>
-              <a:t> — 6 · 9 · </a:t>
-            </a:r>
-            <a:pPr algn="l" indent="0" marL="0">
-              <a:lnSpc>
-                <a:spcPts val="1620"/>
-              </a:lnSpc>
-              <a:spcAft>
-                <a:spcPts val="300"/>
-              </a:spcAft>
-              <a:buNone/>
-            </a:pPr>
-            <a:r>
-              <a:rPr lang="en-US" sz="1200" b="1" dirty="0">
-                <a:solidFill>
-                  <a:srgbClr val="2C2C2C"/>
-                </a:solidFill>
-                <a:latin typeface="Verdana" pitchFamily="34" charset="0"/>
-                <a:ea typeface="Verdana" pitchFamily="34" charset="-122"/>
-                <a:cs typeface="Verdana" pitchFamily="34" charset="-120"/>
-              </a:rPr>
-              <a:t>96</a:t>
-            </a:r>
-            <a:endParaRPr lang="en-US" sz="1200" dirty="0"/>
-          </a:p>
-          <a:p>
-            <a:pPr algn="l" marL="342900" indent="-342900">
-              <a:lnSpc>
-                <a:spcPts val="1620"/>
-              </a:lnSpc>
-              <a:spcAft>
-                <a:spcPts val="300"/>
-              </a:spcAft>
-              <a:buSzPct val="100000"/>
-              <a:buChar char="•"/>
-            </a:pPr>
-            <a:r>
-              <a:rPr lang="en-US" sz="1200" b="1" dirty="0">
-                <a:solidFill>
-                  <a:srgbClr val="2C2C2C"/>
-                </a:solidFill>
-                <a:latin typeface="Verdana" pitchFamily="34" charset="0"/>
-                <a:ea typeface="Verdana" pitchFamily="34" charset="-122"/>
-                <a:cs typeface="Verdana" pitchFamily="34" charset="-120"/>
-              </a:rPr>
-              <a:t>100 − 8</a:t>
-            </a:r>
-            <a:pPr algn="l" indent="0" marL="0">
-              <a:lnSpc>
-                <a:spcPts val="1620"/>
-              </a:lnSpc>
-              <a:spcAft>
-                <a:spcPts val="300"/>
-              </a:spcAft>
-              <a:buNone/>
-            </a:pPr>
-            <a:r>
-              <a:rPr lang="en-US" sz="1200" dirty="0">
-                <a:solidFill>
-                  <a:srgbClr val="2C2C2C"/>
-                </a:solidFill>
-                <a:latin typeface="Verdana" pitchFamily="34" charset="0"/>
-                <a:ea typeface="Verdana" pitchFamily="34" charset="-122"/>
-                <a:cs typeface="Verdana" pitchFamily="34" charset="-120"/>
-              </a:rPr>
-              <a:t> — 2 · 9 · </a:t>
-            </a:r>
-            <a:pPr algn="l" indent="0" marL="0">
-              <a:lnSpc>
-                <a:spcPts val="1620"/>
-              </a:lnSpc>
-              <a:spcAft>
-                <a:spcPts val="300"/>
-              </a:spcAft>
-              <a:buNone/>
-            </a:pPr>
-            <a:r>
-              <a:rPr lang="en-US" sz="1200" b="1" dirty="0">
-                <a:solidFill>
-                  <a:srgbClr val="2C2C2C"/>
-                </a:solidFill>
-                <a:latin typeface="Verdana" pitchFamily="34" charset="0"/>
-                <a:ea typeface="Verdana" pitchFamily="34" charset="-122"/>
-                <a:cs typeface="Verdana" pitchFamily="34" charset="-120"/>
-              </a:rPr>
-              <a:t>92</a:t>
-            </a:r>
-            <a:endParaRPr lang="en-US" sz="1200" dirty="0"/>
-          </a:p>
-          <a:p>
-            <a:pPr algn="l" marL="342900" indent="-342900">
-              <a:lnSpc>
-                <a:spcPts val="1620"/>
-              </a:lnSpc>
-              <a:spcAft>
-                <a:spcPts val="300"/>
-              </a:spcAft>
-              <a:buSzPct val="100000"/>
-              <a:buChar char="•"/>
-            </a:pPr>
-            <a:r>
-              <a:rPr lang="en-US" sz="1200" b="1" dirty="0">
-                <a:solidFill>
-                  <a:srgbClr val="2C2C2C"/>
-                </a:solidFill>
-                <a:latin typeface="Verdana" pitchFamily="34" charset="0"/>
-                <a:ea typeface="Verdana" pitchFamily="34" charset="-122"/>
-                <a:cs typeface="Verdana" pitchFamily="34" charset="-120"/>
-              </a:rPr>
-              <a:t>100 − 1</a:t>
-            </a:r>
-            <a:pPr algn="l" indent="0" marL="0">
-              <a:lnSpc>
-                <a:spcPts val="1620"/>
-              </a:lnSpc>
-              <a:spcAft>
-                <a:spcPts val="300"/>
-              </a:spcAft>
-              <a:buNone/>
-            </a:pPr>
-            <a:r>
-              <a:rPr lang="en-US" sz="1200" dirty="0">
-                <a:solidFill>
-                  <a:srgbClr val="2C2C2C"/>
-                </a:solidFill>
-                <a:latin typeface="Verdana" pitchFamily="34" charset="0"/>
-                <a:ea typeface="Verdana" pitchFamily="34" charset="-122"/>
-                <a:cs typeface="Verdana" pitchFamily="34" charset="-120"/>
-              </a:rPr>
-              <a:t> — 9 · 9 · </a:t>
-            </a:r>
-            <a:pPr algn="l" indent="0" marL="0">
-              <a:lnSpc>
-                <a:spcPts val="1620"/>
-              </a:lnSpc>
-              <a:spcAft>
-                <a:spcPts val="300"/>
-              </a:spcAft>
-              <a:buNone/>
-            </a:pPr>
-            <a:r>
-              <a:rPr lang="en-US" sz="1200" b="1" dirty="0">
-                <a:solidFill>
-                  <a:srgbClr val="2C2C2C"/>
-                </a:solidFill>
-                <a:latin typeface="Verdana" pitchFamily="34" charset="0"/>
-                <a:ea typeface="Verdana" pitchFamily="34" charset="-122"/>
-                <a:cs typeface="Verdana" pitchFamily="34" charset="-120"/>
-              </a:rPr>
-              <a:t>99</a:t>
-            </a:r>
-            <a:endParaRPr lang="en-US" sz="1200" dirty="0"/>
-          </a:p>
-          <a:p>
-            <a:pPr algn="l" marL="342900" indent="-342900">
-              <a:lnSpc>
-                <a:spcPts val="1620"/>
-              </a:lnSpc>
-              <a:spcAft>
-                <a:spcPts val="300"/>
-              </a:spcAft>
-              <a:buSzPct val="100000"/>
-              <a:buChar char="•"/>
-            </a:pPr>
-            <a:r>
-              <a:rPr lang="en-US" sz="1200" b="1" dirty="0">
-                <a:solidFill>
-                  <a:srgbClr val="2C2C2C"/>
-                </a:solidFill>
-                <a:latin typeface="Verdana" pitchFamily="34" charset="0"/>
-                <a:ea typeface="Verdana" pitchFamily="34" charset="-122"/>
-                <a:cs typeface="Verdana" pitchFamily="34" charset="-120"/>
-              </a:rPr>
-              <a:t>100 − 9</a:t>
-            </a:r>
-            <a:pPr algn="l" indent="0" marL="0">
-              <a:lnSpc>
-                <a:spcPts val="1620"/>
-              </a:lnSpc>
-              <a:spcAft>
-                <a:spcPts val="300"/>
-              </a:spcAft>
-              <a:buNone/>
-            </a:pPr>
-            <a:r>
-              <a:rPr lang="en-US" sz="1200" dirty="0">
-                <a:solidFill>
-                  <a:srgbClr val="2C2C2C"/>
-                </a:solidFill>
-                <a:latin typeface="Verdana" pitchFamily="34" charset="0"/>
-                <a:ea typeface="Verdana" pitchFamily="34" charset="-122"/>
-                <a:cs typeface="Verdana" pitchFamily="34" charset="-120"/>
-              </a:rPr>
-              <a:t> — 1 · 9 · </a:t>
-            </a:r>
-            <a:pPr algn="l" indent="0" marL="0">
-              <a:lnSpc>
-                <a:spcPts val="1620"/>
-              </a:lnSpc>
-              <a:spcAft>
-                <a:spcPts val="300"/>
-              </a:spcAft>
-              <a:buNone/>
-            </a:pPr>
-            <a:r>
-              <a:rPr lang="en-US" sz="1200" b="1" dirty="0">
-                <a:solidFill>
-                  <a:srgbClr val="2C2C2C"/>
-                </a:solidFill>
-                <a:latin typeface="Verdana" pitchFamily="34" charset="0"/>
-                <a:ea typeface="Verdana" pitchFamily="34" charset="-122"/>
-                <a:cs typeface="Verdana" pitchFamily="34" charset="-120"/>
-              </a:rPr>
-              <a:t>91</a:t>
-            </a:r>
-            <a:endParaRPr lang="en-US" sz="1200" dirty="0"/>
-          </a:p>
-        </p:txBody>
-      </p:sp>
-      <p:sp>
-        <p:nvSpPr>
-          <p:cNvPr id="15" name="Text 13"/>
-          <p:cNvSpPr/>
-          <p:nvPr/>
-        </p:nvSpPr>
-        <p:spPr>
-          <a:xfrm>
-            <a:off x="406301" y="4800302"/>
+            <a:off x="406301" y="4434929"/>
             <a:ext cx="8498026" cy="213271"/>
           </a:xfrm>
           <a:prstGeom prst="rect">
@@ -4064,7 +4734,7 @@
                 <a:ea typeface="Georgia" pitchFamily="34" charset="-122"/>
                 <a:cs typeface="Georgia" pitchFamily="34" charset="-120"/>
               </a:rPr>
-              <a:t>Activity: bar-model worksheet (15 min)</a:t>
+              <a:t>Bar-model demo (10 min)</a:t>
             </a:r>
             <a:endParaRPr lang="en-US" sz="1800" dirty="0"/>
           </a:p>
@@ -4112,7 +4782,7 @@
                 <a:ea typeface="Verdana" pitchFamily="34" charset="-122"/>
                 <a:cs typeface="Verdana" pitchFamily="34" charset="-120"/>
               </a:rPr>
-              <a:t>Each child gets a printed worksheet with 6 bar-model problems:</a:t>
+              <a:t>Draw a big bar on the board (or use the strip). Mark off 10 sections of 10 each. Total: 100.</a:t>
             </a:r>
             <a:endParaRPr lang="en-US" sz="1200" dirty="0"/>
           </a:p>
@@ -4126,50 +4796,139 @@
         </p:nvSpPr>
         <p:spPr>
           <a:xfrm>
-            <a:off x="406301" y="1173063"/>
-            <a:ext cx="8331398" cy="1301353"/>
-          </a:xfrm>
-          <a:prstGeom prst="rect">
-            <a:avLst/>
-          </a:prstGeom>
-          <a:solidFill>
-            <a:srgbClr val="FFFFFF"/>
-          </a:solidFill>
-          <a:ln/>
-        </p:spPr>
-        <p:txBody>
-          <a:bodyPr wrap="square" rtlCol="0" anchor="ctr"/>
-          <a:lstStyle/>
-          <a:p>
-            <a:pPr indent="0" marL="0">
-              <a:buNone/>
-            </a:pPr>
-            <a:endParaRPr lang="en-US" dirty="0"/>
-          </a:p>
-        </p:txBody>
-      </p:sp>
-      <p:sp>
-        <p:nvSpPr>
-          <p:cNvPr id="6" name="Shape 4"/>
-          <p:cNvSpPr/>
-          <p:nvPr/>
-        </p:nvSpPr>
-        <p:spPr>
-          <a:xfrm>
-            <a:off x="430113" y="1173063"/>
-            <a:ext cx="0" cy="1301353"/>
-          </a:xfrm>
-          <a:prstGeom prst="line">
+            <a:off x="406301" y="1160413"/>
+            <a:ext cx="8498026" cy="213271"/>
+          </a:xfrm>
+          <a:prstGeom prst="rect">
             <a:avLst/>
           </a:prstGeom>
           <a:noFill/>
-          <a:ln w="47625">
-            <a:solidFill>
-              <a:srgbClr val="87A96B"/>
-            </a:solidFill>
-            <a:prstDash val="solid"/>
-          </a:ln>
-        </p:spPr>
+          <a:ln/>
+        </p:spPr>
+        <p:txBody>
+          <a:bodyPr wrap="square" lIns="0" tIns="0" rIns="0" bIns="0" rtlCol="0" anchor="t"/>
+          <a:lstStyle/>
+          <a:p>
+            <a:pPr algn="l" indent="0" marL="0">
+              <a:lnSpc>
+                <a:spcPts val="1680"/>
+              </a:lnSpc>
+              <a:spcBef>
+                <a:spcPts val="300"/>
+              </a:spcBef>
+              <a:spcAft>
+                <a:spcPts val="300"/>
+              </a:spcAft>
+              <a:buNone/>
+            </a:pPr>
+            <a:r>
+              <a:rPr lang="en-US" sz="1200" dirty="0">
+                <a:solidFill>
+                  <a:srgbClr val="2C2C2C"/>
+                </a:solidFill>
+                <a:latin typeface="Verdana" pitchFamily="34" charset="0"/>
+                <a:ea typeface="Verdana" pitchFamily="34" charset="-122"/>
+                <a:cs typeface="Verdana" pitchFamily="34" charset="-120"/>
+              </a:rPr>
+              <a:t>Teacher: </a:t>
+            </a:r>
+            <a:pPr algn="l" indent="0" marL="0">
+              <a:lnSpc>
+                <a:spcPts val="1680"/>
+              </a:lnSpc>
+              <a:spcBef>
+                <a:spcPts val="300"/>
+              </a:spcBef>
+              <a:spcAft>
+                <a:spcPts val="300"/>
+              </a:spcAft>
+              <a:buNone/>
+            </a:pPr>
+            <a:r>
+              <a:rPr lang="en-US" sz="1200" i="1" dirty="0">
+                <a:solidFill>
+                  <a:srgbClr val="2C2C2C"/>
+                </a:solidFill>
+                <a:latin typeface="Verdana" pitchFamily="34" charset="0"/>
+                <a:ea typeface="Verdana" pitchFamily="34" charset="-122"/>
+                <a:cs typeface="Verdana" pitchFamily="34" charset="-120"/>
+              </a:rPr>
+              <a:t>"100 ants on a hundred leaves. 7 ants walk off. How many left?"</a:t>
+            </a:r>
+            <a:endParaRPr lang="en-US" sz="1200" dirty="0"/>
+          </a:p>
+        </p:txBody>
+      </p:sp>
+      <p:sp>
+        <p:nvSpPr>
+          <p:cNvPr id="6" name="Text 4"/>
+          <p:cNvSpPr/>
+          <p:nvPr/>
+        </p:nvSpPr>
+        <p:spPr>
+          <a:xfrm>
+            <a:off x="406301" y="1449884"/>
+            <a:ext cx="8498026" cy="213271"/>
+          </a:xfrm>
+          <a:prstGeom prst="rect">
+            <a:avLst/>
+          </a:prstGeom>
+          <a:noFill/>
+          <a:ln/>
+        </p:spPr>
+        <p:txBody>
+          <a:bodyPr wrap="square" lIns="0" tIns="0" rIns="0" bIns="0" rtlCol="0" anchor="t"/>
+          <a:lstStyle/>
+          <a:p>
+            <a:pPr algn="l" indent="0" marL="0">
+              <a:lnSpc>
+                <a:spcPts val="1680"/>
+              </a:lnSpc>
+              <a:spcBef>
+                <a:spcPts val="300"/>
+              </a:spcBef>
+              <a:spcAft>
+                <a:spcPts val="300"/>
+              </a:spcAft>
+              <a:buNone/>
+            </a:pPr>
+            <a:r>
+              <a:rPr lang="en-US" sz="1200" dirty="0">
+                <a:solidFill>
+                  <a:srgbClr val="2C2C2C"/>
+                </a:solidFill>
+                <a:latin typeface="Verdana" pitchFamily="34" charset="0"/>
+                <a:ea typeface="Verdana" pitchFamily="34" charset="-122"/>
+                <a:cs typeface="Verdana" pitchFamily="34" charset="-120"/>
+              </a:rPr>
+              <a:t>Cross off 7 squares from the rightmost group. </a:t>
+            </a:r>
+            <a:pPr algn="l" indent="0" marL="0">
+              <a:lnSpc>
+                <a:spcPts val="1680"/>
+              </a:lnSpc>
+              <a:spcBef>
+                <a:spcPts val="300"/>
+              </a:spcBef>
+              <a:spcAft>
+                <a:spcPts val="300"/>
+              </a:spcAft>
+              <a:buNone/>
+            </a:pPr>
+            <a:r>
+              <a:rPr lang="en-US" sz="1200" i="1" dirty="0">
+                <a:solidFill>
+                  <a:srgbClr val="2C2C2C"/>
+                </a:solidFill>
+                <a:latin typeface="Verdana" pitchFamily="34" charset="0"/>
+                <a:ea typeface="Verdana" pitchFamily="34" charset="-122"/>
+                <a:cs typeface="Verdana" pitchFamily="34" charset="-120"/>
+              </a:rPr>
+              <a:t>"This last group used to be 10. Now it's 3."</a:t>
+            </a:r>
+            <a:endParaRPr lang="en-US" sz="1200" dirty="0"/>
+          </a:p>
+        </p:txBody>
       </p:sp>
       <p:sp>
         <p:nvSpPr>
@@ -4179,8 +4938,8 @@
         </p:nvSpPr>
         <p:spPr>
           <a:xfrm>
-            <a:off x="631627" y="1300014"/>
-            <a:ext cx="8086939" cy="174575"/>
+            <a:off x="406301" y="1739354"/>
+            <a:ext cx="8498026" cy="213271"/>
           </a:xfrm>
           <a:prstGeom prst="rect">
             <a:avLst/>
@@ -4194,286 +4953,34 @@
           <a:p>
             <a:pPr algn="l" indent="0" marL="0">
               <a:lnSpc>
-                <a:spcPts val="1375"/>
-              </a:lnSpc>
-              <a:buNone/>
-            </a:pPr>
-            <a:r>
-              <a:rPr lang="en-US" sz="1100" dirty="0">
-                <a:solidFill>
-                  <a:srgbClr val="2C2C2C"/>
-                </a:solidFill>
-                <a:latin typeface="Courier New" pitchFamily="34" charset="0"/>
-                <a:ea typeface="Courier New" pitchFamily="34" charset="-122"/>
-                <a:cs typeface="Courier New" pitchFamily="34" charset="-120"/>
-              </a:rPr>
-              <a:t>100 − 3 = ?</a:t>
-            </a:r>
-            <a:endParaRPr lang="en-US" sz="1100" dirty="0"/>
+                <a:spcPts val="1680"/>
+              </a:lnSpc>
+              <a:spcBef>
+                <a:spcPts val="300"/>
+              </a:spcBef>
+              <a:spcAft>
+                <a:spcPts val="300"/>
+              </a:spcAft>
+              <a:buNone/>
+            </a:pPr>
+            <a:r>
+              <a:rPr lang="en-US" sz="1200" i="1" dirty="0">
+                <a:solidFill>
+                  <a:srgbClr val="2C2C2C"/>
+                </a:solidFill>
+                <a:latin typeface="Verdana" pitchFamily="34" charset="0"/>
+                <a:ea typeface="Verdana" pitchFamily="34" charset="-122"/>
+                <a:cs typeface="Verdana" pitchFamily="34" charset="-120"/>
+              </a:rPr>
+              <a:t>"How many groups of 10 still left? NINE groups. Plus the 3 leftover ants. So 90 + 3 = 93."</a:t>
+            </a:r>
+            <a:endParaRPr lang="en-US" sz="1200" dirty="0"/>
           </a:p>
         </p:txBody>
       </p:sp>
       <p:sp>
         <p:nvSpPr>
           <p:cNvPr id="8" name="Text 6"/>
-          <p:cNvSpPr/>
-          <p:nvPr/>
-        </p:nvSpPr>
-        <p:spPr>
-          <a:xfrm>
-            <a:off x="631627" y="1474589"/>
-            <a:ext cx="8086939" cy="174575"/>
-          </a:xfrm>
-          <a:prstGeom prst="rect">
-            <a:avLst/>
-          </a:prstGeom>
-          <a:noFill/>
-          <a:ln/>
-        </p:spPr>
-        <p:txBody>
-          <a:bodyPr wrap="square" lIns="0" tIns="0" rIns="0" bIns="0" rtlCol="0" anchor="t"/>
-          <a:lstStyle/>
-          <a:p>
-            <a:pPr algn="l" indent="0" marL="0">
-              <a:lnSpc>
-                <a:spcPts val="1375"/>
-              </a:lnSpc>
-              <a:buNone/>
-            </a:pPr>
-            <a:r>
-              <a:rPr lang="en-US" sz="1100" dirty="0">
-                <a:solidFill>
-                  <a:srgbClr val="2C2C2C"/>
-                </a:solidFill>
-                <a:latin typeface="Courier New" pitchFamily="34" charset="0"/>
-                <a:ea typeface="Courier New" pitchFamily="34" charset="-122"/>
-                <a:cs typeface="Courier New" pitchFamily="34" charset="-120"/>
-              </a:rPr>
-              <a:t>100 − 5 = ?</a:t>
-            </a:r>
-            <a:endParaRPr lang="en-US" sz="1100" dirty="0"/>
-          </a:p>
-        </p:txBody>
-      </p:sp>
-      <p:sp>
-        <p:nvSpPr>
-          <p:cNvPr id="9" name="Text 7"/>
-          <p:cNvSpPr/>
-          <p:nvPr/>
-        </p:nvSpPr>
-        <p:spPr>
-          <a:xfrm>
-            <a:off x="631627" y="1649164"/>
-            <a:ext cx="8086939" cy="174575"/>
-          </a:xfrm>
-          <a:prstGeom prst="rect">
-            <a:avLst/>
-          </a:prstGeom>
-          <a:noFill/>
-          <a:ln/>
-        </p:spPr>
-        <p:txBody>
-          <a:bodyPr wrap="square" lIns="0" tIns="0" rIns="0" bIns="0" rtlCol="0" anchor="t"/>
-          <a:lstStyle/>
-          <a:p>
-            <a:pPr algn="l" indent="0" marL="0">
-              <a:lnSpc>
-                <a:spcPts val="1375"/>
-              </a:lnSpc>
-              <a:buNone/>
-            </a:pPr>
-            <a:r>
-              <a:rPr lang="en-US" sz="1100" dirty="0">
-                <a:solidFill>
-                  <a:srgbClr val="2C2C2C"/>
-                </a:solidFill>
-                <a:latin typeface="Courier New" pitchFamily="34" charset="0"/>
-                <a:ea typeface="Courier New" pitchFamily="34" charset="-122"/>
-                <a:cs typeface="Courier New" pitchFamily="34" charset="-120"/>
-              </a:rPr>
-              <a:t>100 − 6 = ?</a:t>
-            </a:r>
-            <a:endParaRPr lang="en-US" sz="1100" dirty="0"/>
-          </a:p>
-        </p:txBody>
-      </p:sp>
-      <p:sp>
-        <p:nvSpPr>
-          <p:cNvPr id="10" name="Text 8"/>
-          <p:cNvSpPr/>
-          <p:nvPr/>
-        </p:nvSpPr>
-        <p:spPr>
-          <a:xfrm>
-            <a:off x="631627" y="1823740"/>
-            <a:ext cx="8086939" cy="174575"/>
-          </a:xfrm>
-          <a:prstGeom prst="rect">
-            <a:avLst/>
-          </a:prstGeom>
-          <a:noFill/>
-          <a:ln/>
-        </p:spPr>
-        <p:txBody>
-          <a:bodyPr wrap="square" lIns="0" tIns="0" rIns="0" bIns="0" rtlCol="0" anchor="t"/>
-          <a:lstStyle/>
-          <a:p>
-            <a:pPr algn="l" indent="0" marL="0">
-              <a:lnSpc>
-                <a:spcPts val="1375"/>
-              </a:lnSpc>
-              <a:buNone/>
-            </a:pPr>
-            <a:r>
-              <a:rPr lang="en-US" sz="1100" dirty="0">
-                <a:solidFill>
-                  <a:srgbClr val="2C2C2C"/>
-                </a:solidFill>
-                <a:latin typeface="Courier New" pitchFamily="34" charset="0"/>
-                <a:ea typeface="Courier New" pitchFamily="34" charset="-122"/>
-                <a:cs typeface="Courier New" pitchFamily="34" charset="-120"/>
-              </a:rPr>
-              <a:t>100 − 2 = ?</a:t>
-            </a:r>
-            <a:endParaRPr lang="en-US" sz="1100" dirty="0"/>
-          </a:p>
-        </p:txBody>
-      </p:sp>
-      <p:sp>
-        <p:nvSpPr>
-          <p:cNvPr id="11" name="Text 9"/>
-          <p:cNvSpPr/>
-          <p:nvPr/>
-        </p:nvSpPr>
-        <p:spPr>
-          <a:xfrm>
-            <a:off x="631627" y="1998315"/>
-            <a:ext cx="8086939" cy="174575"/>
-          </a:xfrm>
-          <a:prstGeom prst="rect">
-            <a:avLst/>
-          </a:prstGeom>
-          <a:noFill/>
-          <a:ln/>
-        </p:spPr>
-        <p:txBody>
-          <a:bodyPr wrap="square" lIns="0" tIns="0" rIns="0" bIns="0" rtlCol="0" anchor="t"/>
-          <a:lstStyle/>
-          <a:p>
-            <a:pPr algn="l" indent="0" marL="0">
-              <a:lnSpc>
-                <a:spcPts val="1375"/>
-              </a:lnSpc>
-              <a:buNone/>
-            </a:pPr>
-            <a:r>
-              <a:rPr lang="en-US" sz="1100" dirty="0">
-                <a:solidFill>
-                  <a:srgbClr val="2C2C2C"/>
-                </a:solidFill>
-                <a:latin typeface="Courier New" pitchFamily="34" charset="0"/>
-                <a:ea typeface="Courier New" pitchFamily="34" charset="-122"/>
-                <a:cs typeface="Courier New" pitchFamily="34" charset="-120"/>
-              </a:rPr>
-              <a:t>100 − 8 = ?</a:t>
-            </a:r>
-            <a:endParaRPr lang="en-US" sz="1100" dirty="0"/>
-          </a:p>
-        </p:txBody>
-      </p:sp>
-      <p:sp>
-        <p:nvSpPr>
-          <p:cNvPr id="12" name="Text 10"/>
-          <p:cNvSpPr/>
-          <p:nvPr/>
-        </p:nvSpPr>
-        <p:spPr>
-          <a:xfrm>
-            <a:off x="631627" y="2172891"/>
-            <a:ext cx="8086939" cy="174575"/>
-          </a:xfrm>
-          <a:prstGeom prst="rect">
-            <a:avLst/>
-          </a:prstGeom>
-          <a:noFill/>
-          <a:ln/>
-        </p:spPr>
-        <p:txBody>
-          <a:bodyPr wrap="square" lIns="0" tIns="0" rIns="0" bIns="0" rtlCol="0" anchor="t"/>
-          <a:lstStyle/>
-          <a:p>
-            <a:pPr algn="l" indent="0" marL="0">
-              <a:lnSpc>
-                <a:spcPts val="1375"/>
-              </a:lnSpc>
-              <a:buNone/>
-            </a:pPr>
-            <a:r>
-              <a:rPr lang="en-US" sz="1100" dirty="0">
-                <a:solidFill>
-                  <a:srgbClr val="2C2C2C"/>
-                </a:solidFill>
-                <a:latin typeface="Courier New" pitchFamily="34" charset="0"/>
-                <a:ea typeface="Courier New" pitchFamily="34" charset="-122"/>
-                <a:cs typeface="Courier New" pitchFamily="34" charset="-120"/>
-              </a:rPr>
-              <a:t>100 − 7 = ?</a:t>
-            </a:r>
-            <a:endParaRPr lang="en-US" sz="1100" dirty="0"/>
-          </a:p>
-        </p:txBody>
-      </p:sp>
-      <p:sp>
-        <p:nvSpPr>
-          <p:cNvPr id="13" name="Text 11"/>
-          <p:cNvSpPr/>
-          <p:nvPr/>
-        </p:nvSpPr>
-        <p:spPr>
-          <a:xfrm>
-            <a:off x="406301" y="2563267"/>
-            <a:ext cx="8498026" cy="426541"/>
-          </a:xfrm>
-          <a:prstGeom prst="rect">
-            <a:avLst/>
-          </a:prstGeom>
-          <a:noFill/>
-          <a:ln/>
-        </p:spPr>
-        <p:txBody>
-          <a:bodyPr wrap="square" lIns="0" tIns="0" rIns="0" bIns="0" rtlCol="0" anchor="t"/>
-          <a:lstStyle/>
-          <a:p>
-            <a:pPr algn="l" indent="0" marL="0">
-              <a:lnSpc>
-                <a:spcPts val="1680"/>
-              </a:lnSpc>
-              <a:spcBef>
-                <a:spcPts val="300"/>
-              </a:spcBef>
-              <a:spcAft>
-                <a:spcPts val="300"/>
-              </a:spcAft>
-              <a:buNone/>
-            </a:pPr>
-            <a:r>
-              <a:rPr lang="en-US" sz="1200" dirty="0">
-                <a:solidFill>
-                  <a:srgbClr val="2C2C2C"/>
-                </a:solidFill>
-                <a:latin typeface="Verdana" pitchFamily="34" charset="0"/>
-                <a:ea typeface="Verdana" pitchFamily="34" charset="-122"/>
-                <a:cs typeface="Verdana" pitchFamily="34" charset="-120"/>
-              </a:rPr>
-              <a:t>For each: shade the right number of squares, then read off the answer. Bonus: write the friend pair next to it.</a:t>
-            </a:r>
-            <a:endParaRPr lang="en-US" sz="1200" dirty="0"/>
-          </a:p>
-        </p:txBody>
-      </p:sp>
-      <p:sp>
-        <p:nvSpPr>
-          <p:cNvPr id="14" name="Text 12"/>
           <p:cNvSpPr/>
           <p:nvPr/>
         </p:nvSpPr>
@@ -4623,7 +5130,7 @@
                 <a:ea typeface="Georgia" pitchFamily="34" charset="-122"/>
                 <a:cs typeface="Georgia" pitchFamily="34" charset="-120"/>
               </a:rPr>
-              <a:t>Wrap-up (5 min)</a:t>
+              <a:t>Bar-model demo (10 min) (cont.)</a:t>
             </a:r>
             <a:endParaRPr lang="en-US" sz="1800" dirty="0"/>
           </a:p>
@@ -4637,13 +5144,66 @@
         </p:nvSpPr>
         <p:spPr>
           <a:xfrm>
-            <a:off x="406301" y="870942"/>
-            <a:ext cx="8498026" cy="232321"/>
-          </a:xfrm>
-          <a:prstGeom prst="rect">
+            <a:off x="406301" y="883593"/>
+            <a:ext cx="8331398" cy="900113"/>
+          </a:xfrm>
+          <a:prstGeom prst="rect">
+            <a:avLst/>
+          </a:prstGeom>
+          <a:solidFill>
+            <a:srgbClr val="FFFFFF"/>
+          </a:solidFill>
+          <a:ln/>
+        </p:spPr>
+        <p:txBody>
+          <a:bodyPr wrap="square" rtlCol="0" anchor="ctr"/>
+          <a:lstStyle/>
+          <a:p>
+            <a:pPr indent="0" marL="0">
+              <a:buNone/>
+            </a:pPr>
+            <a:endParaRPr lang="en-US" dirty="0"/>
+          </a:p>
+        </p:txBody>
+      </p:sp>
+      <p:sp>
+        <p:nvSpPr>
+          <p:cNvPr id="5" name="Shape 3"/>
+          <p:cNvSpPr/>
+          <p:nvPr/>
+        </p:nvSpPr>
+        <p:spPr>
+          <a:xfrm>
+            <a:off x="434876" y="883593"/>
+            <a:ext cx="0" cy="900113"/>
+          </a:xfrm>
+          <a:prstGeom prst="line">
             <a:avLst/>
           </a:prstGeom>
           <a:noFill/>
+          <a:ln w="57150">
+            <a:solidFill>
+              <a:srgbClr val="E07A5F"/>
+            </a:solidFill>
+            <a:prstDash val="solid"/>
+          </a:ln>
+        </p:spPr>
+      </p:sp>
+      <p:sp>
+        <p:nvSpPr>
+          <p:cNvPr id="6" name="Text 4"/>
+          <p:cNvSpPr/>
+          <p:nvPr/>
+        </p:nvSpPr>
+        <p:spPr>
+          <a:xfrm>
+            <a:off x="692051" y="1074093"/>
+            <a:ext cx="7973389" cy="230981"/>
+          </a:xfrm>
+          <a:prstGeom prst="rect">
+            <a:avLst/>
+          </a:prstGeom>
+          <a:noFill/>
           <a:ln/>
         </p:spPr>
         <p:txBody>
@@ -4652,6 +5212,171 @@
           <a:p>
             <a:pPr algn="l" indent="0" marL="0">
               <a:lnSpc>
+                <a:spcPts val="1820"/>
+              </a:lnSpc>
+              <a:spcBef>
+                <a:spcPts val="300"/>
+              </a:spcBef>
+              <a:spcAft>
+                <a:spcPts val="300"/>
+              </a:spcAft>
+              <a:buNone/>
+            </a:pPr>
+            <a:r>
+              <a:rPr lang="en-US" sz="1300" b="1" i="1" dirty="0">
+                <a:solidFill>
+                  <a:srgbClr val="2C2C2C"/>
+                </a:solidFill>
+                <a:latin typeface="Georgia" pitchFamily="34" charset="0"/>
+                <a:ea typeface="Georgia" pitchFamily="34" charset="-122"/>
+                <a:cs typeface="Georgia" pitchFamily="34" charset="-120"/>
+              </a:rPr>
+              <a:t>The trick:</a:t>
+            </a:r>
+            <a:pPr algn="l" indent="0" marL="0">
+              <a:lnSpc>
+                <a:spcPts val="1820"/>
+              </a:lnSpc>
+              <a:spcBef>
+                <a:spcPts val="300"/>
+              </a:spcBef>
+              <a:spcAft>
+                <a:spcPts val="300"/>
+              </a:spcAft>
+              <a:buNone/>
+            </a:pPr>
+            <a:r>
+              <a:rPr lang="en-US" sz="1300" dirty="0">
+                <a:solidFill>
+                  <a:srgbClr val="2C2C2C"/>
+                </a:solidFill>
+                <a:latin typeface="Georgia" pitchFamily="34" charset="0"/>
+                <a:ea typeface="Georgia" pitchFamily="34" charset="-122"/>
+                <a:cs typeface="Georgia" pitchFamily="34" charset="-120"/>
+              </a:rPr>
+              <a:t> 7's friend is 3 (10 minus 7 = 3). And there are 9 groups of 10 still standing.</a:t>
+            </a:r>
+            <a:endParaRPr lang="en-US" sz="1300" dirty="0"/>
+          </a:p>
+        </p:txBody>
+      </p:sp>
+      <p:sp>
+        <p:nvSpPr>
+          <p:cNvPr id="7" name="Text 5"/>
+          <p:cNvSpPr/>
+          <p:nvPr/>
+        </p:nvSpPr>
+        <p:spPr>
+          <a:xfrm>
+            <a:off x="692051" y="1343174"/>
+            <a:ext cx="7973389" cy="250031"/>
+          </a:xfrm>
+          <a:prstGeom prst="rect">
+            <a:avLst/>
+          </a:prstGeom>
+          <a:noFill/>
+          <a:ln/>
+        </p:spPr>
+        <p:txBody>
+          <a:bodyPr wrap="square" lIns="0" tIns="0" rIns="0" bIns="0" rtlCol="0" anchor="t"/>
+          <a:lstStyle/>
+          <a:p>
+            <a:pPr algn="l" indent="0" marL="0">
+              <a:lnSpc>
+                <a:spcPts val="1820"/>
+              </a:lnSpc>
+              <a:spcBef>
+                <a:spcPts val="300"/>
+              </a:spcBef>
+              <a:spcAft>
+                <a:spcPts val="300"/>
+              </a:spcAft>
+              <a:buNone/>
+            </a:pPr>
+            <a:r>
+              <a:rPr lang="en-US" sz="1300" dirty="0">
+                <a:solidFill>
+                  <a:srgbClr val="2C2C2C"/>
+                </a:solidFill>
+                <a:latin typeface="Georgia" pitchFamily="34" charset="0"/>
+                <a:ea typeface="Georgia" pitchFamily="34" charset="-122"/>
+                <a:cs typeface="Georgia" pitchFamily="34" charset="-120"/>
+              </a:rPr>
+              <a:t>So </a:t>
+            </a:r>
+            <a:pPr algn="l" indent="0" marL="0">
+              <a:lnSpc>
+                <a:spcPts val="1820"/>
+              </a:lnSpc>
+              <a:spcBef>
+                <a:spcPts val="300"/>
+              </a:spcBef>
+              <a:spcAft>
+                <a:spcPts val="300"/>
+              </a:spcAft>
+              <a:buNone/>
+            </a:pPr>
+            <a:r>
+              <a:rPr lang="en-US" sz="1300" i="1" dirty="0">
+                <a:solidFill>
+                  <a:srgbClr val="2C2C2C"/>
+                </a:solidFill>
+                <a:latin typeface="Georgia" pitchFamily="34" charset="0"/>
+                <a:ea typeface="Georgia" pitchFamily="34" charset="-122"/>
+                <a:cs typeface="Georgia" pitchFamily="34" charset="-120"/>
+              </a:rPr>
+              <a:t>100 − 7 = 93</a:t>
+            </a:r>
+            <a:pPr algn="l" indent="0" marL="0">
+              <a:lnSpc>
+                <a:spcPts val="1820"/>
+              </a:lnSpc>
+              <a:spcBef>
+                <a:spcPts val="300"/>
+              </a:spcBef>
+              <a:spcAft>
+                <a:spcPts val="300"/>
+              </a:spcAft>
+              <a:buNone/>
+            </a:pPr>
+            <a:r>
+              <a:rPr lang="en-US" sz="1300" dirty="0">
+                <a:solidFill>
+                  <a:srgbClr val="2C2C2C"/>
+                </a:solidFill>
+                <a:latin typeface="Georgia" pitchFamily="34" charset="0"/>
+                <a:ea typeface="Georgia" pitchFamily="34" charset="-122"/>
+                <a:cs typeface="Georgia" pitchFamily="34" charset="-120"/>
+              </a:rPr>
+              <a:t>.</a:t>
+            </a:r>
+            <a:endParaRPr lang="en-US" sz="1300" dirty="0"/>
+          </a:p>
+        </p:txBody>
+      </p:sp>
+      <p:sp>
+        <p:nvSpPr>
+          <p:cNvPr id="8" name="Text 6"/>
+          <p:cNvSpPr/>
+          <p:nvPr/>
+        </p:nvSpPr>
+        <p:spPr>
+          <a:xfrm>
+            <a:off x="406301" y="1872555"/>
+            <a:ext cx="8498026" cy="213271"/>
+          </a:xfrm>
+          <a:prstGeom prst="rect">
+            <a:avLst/>
+          </a:prstGeom>
+          <a:noFill/>
+          <a:ln/>
+        </p:spPr>
+        <p:txBody>
+          <a:bodyPr wrap="square" lIns="0" tIns="0" rIns="0" bIns="0" rtlCol="0" anchor="t"/>
+          <a:lstStyle/>
+          <a:p>
+            <a:pPr algn="l" indent="0" marL="0">
+              <a:lnSpc>
                 <a:spcPts val="1680"/>
               </a:lnSpc>
               <a:spcBef>
@@ -4671,8 +5396,33 @@
                 <a:ea typeface="Verdana" pitchFamily="34" charset="-122"/>
                 <a:cs typeface="Verdana" pitchFamily="34" charset="-120"/>
               </a:rPr>
-              <a:t>– Quick fire: teacher calls </a:t>
-            </a:r>
+              <a:t>Demo 3 more, with class predicting:</a:t>
+            </a:r>
+            <a:endParaRPr lang="en-US" sz="1200" dirty="0"/>
+          </a:p>
+        </p:txBody>
+      </p:sp>
+      <p:sp>
+        <p:nvSpPr>
+          <p:cNvPr id="9" name="Text 7"/>
+          <p:cNvSpPr/>
+          <p:nvPr/>
+        </p:nvSpPr>
+        <p:spPr>
+          <a:xfrm>
+            <a:off x="406301" y="2162026"/>
+            <a:ext cx="8498026" cy="213271"/>
+          </a:xfrm>
+          <a:prstGeom prst="rect">
+            <a:avLst/>
+          </a:prstGeom>
+          <a:noFill/>
+          <a:ln/>
+        </p:spPr>
+        <p:txBody>
+          <a:bodyPr wrap="square" lIns="0" tIns="0" rIns="0" bIns="0" rtlCol="0" anchor="t"/>
+          <a:lstStyle/>
+          <a:p>
             <a:pPr algn="l" indent="0" marL="0">
               <a:lnSpc>
                 <a:spcPts val="1680"/>
@@ -4686,38 +5436,15 @@
               <a:buNone/>
             </a:pPr>
             <a:r>
-              <a:rPr lang="en-US" sz="1200" dirty="0">
-                <a:solidFill>
-                  <a:srgbClr val="2C2C2C"/>
-                </a:solidFill>
-                <a:latin typeface="Verdana" pitchFamily="34" charset="0"/>
-                <a:ea typeface="Verdana" pitchFamily="34" charset="-122"/>
-                <a:cs typeface="Verdana" pitchFamily="34" charset="-120"/>
-              </a:rPr>
-              <a:t>100 − N</a:t>
-            </a:r>
-            <a:pPr algn="l" indent="0" marL="0">
-              <a:lnSpc>
-                <a:spcPts val="1680"/>
-              </a:lnSpc>
-              <a:spcBef>
-                <a:spcPts val="300"/>
-              </a:spcBef>
-              <a:spcAft>
-                <a:spcPts val="300"/>
-              </a:spcAft>
-              <a:buNone/>
-            </a:pPr>
-            <a:r>
-              <a:rPr lang="en-US" sz="1200" dirty="0">
-                <a:solidFill>
-                  <a:srgbClr val="2C2C2C"/>
-                </a:solidFill>
-                <a:latin typeface="Verdana" pitchFamily="34" charset="0"/>
-                <a:ea typeface="Verdana" pitchFamily="34" charset="-122"/>
-                <a:cs typeface="Verdana" pitchFamily="34" charset="-120"/>
-              </a:rPr>
-              <a:t>; children chorus the answer. – Daily chant.</a:t>
+              <a:rPr lang="en-US" sz="1200" i="1" dirty="0">
+                <a:solidFill>
+                  <a:srgbClr val="2C2C2C"/>
+                </a:solidFill>
+                <a:latin typeface="Verdana" pitchFamily="34" charset="0"/>
+                <a:ea typeface="Verdana" pitchFamily="34" charset="-122"/>
+                <a:cs typeface="Verdana" pitchFamily="34" charset="-120"/>
+              </a:rPr>
+              <a:t>Each row: Problem · Friend of N · 9 in front · Answer.</a:t>
             </a:r>
             <a:endParaRPr lang="en-US" sz="1200" dirty="0"/>
           </a:p>
@@ -4725,7 +5452,7 @@
       </p:sp>
       <p:sp>
         <p:nvSpPr>
-          <p:cNvPr id="5" name="Text 3"/>
+          <p:cNvPr id="10" name="Text 8"/>
           <p:cNvSpPr/>
           <p:nvPr/>
         </p:nvSpPr>
@@ -4875,7 +5602,7 @@
                 <a:ea typeface="Georgia" pitchFamily="34" charset="-122"/>
                 <a:cs typeface="Georgia" pitchFamily="34" charset="-120"/>
               </a:rPr>
-              <a:t>Homework / take-home</a:t>
+              <a:t>Bar-model demo (10 min) (cont.)</a:t>
             </a:r>
             <a:endParaRPr lang="en-US" sz="1800" dirty="0"/>
           </a:p>
@@ -4889,8 +5616,8 @@
         </p:nvSpPr>
         <p:spPr>
           <a:xfrm>
-            <a:off x="406301" y="870942"/>
-            <a:ext cx="8498026" cy="464641"/>
+            <a:off x="634901" y="883593"/>
+            <a:ext cx="8102798" cy="1013222"/>
           </a:xfrm>
           <a:prstGeom prst="rect">
             <a:avLst/>
@@ -4902,13 +5629,31 @@
           <a:bodyPr wrap="square" lIns="0" tIns="0" rIns="0" bIns="0" rtlCol="0" anchor="t"/>
           <a:lstStyle/>
           <a:p>
-            <a:pPr algn="l" indent="0" marL="0">
-              <a:lnSpc>
-                <a:spcPts val="1680"/>
-              </a:lnSpc>
-              <a:spcBef>
-                <a:spcPts val="300"/>
-              </a:spcBef>
+            <a:pPr algn="l" marL="342900" indent="-342900">
+              <a:lnSpc>
+                <a:spcPts val="1620"/>
+              </a:lnSpc>
+              <a:spcAft>
+                <a:spcPts val="300"/>
+              </a:spcAft>
+              <a:buSzPct val="100000"/>
+              <a:buChar char="•"/>
+            </a:pPr>
+            <a:r>
+              <a:rPr lang="en-US" sz="1200" b="1" dirty="0">
+                <a:solidFill>
+                  <a:srgbClr val="2C2C2C"/>
+                </a:solidFill>
+                <a:latin typeface="Verdana" pitchFamily="34" charset="0"/>
+                <a:ea typeface="Verdana" pitchFamily="34" charset="-122"/>
+                <a:cs typeface="Verdana" pitchFamily="34" charset="-120"/>
+              </a:rPr>
+              <a:t>100 − 4</a:t>
+            </a:r>
+            <a:pPr algn="l" indent="0" marL="0">
+              <a:lnSpc>
+                <a:spcPts val="1620"/>
+              </a:lnSpc>
               <a:spcAft>
                 <a:spcPts val="300"/>
               </a:spcAft>
@@ -4923,15 +5668,56 @@
                 <a:ea typeface="Verdana" pitchFamily="34" charset="-122"/>
                 <a:cs typeface="Verdana" pitchFamily="34" charset="-120"/>
               </a:rPr>
-              <a:t>– 10 problems: </a:t>
-            </a:r>
-            <a:pPr algn="l" indent="0" marL="0">
-              <a:lnSpc>
-                <a:spcPts val="1680"/>
-              </a:lnSpc>
-              <a:spcBef>
-                <a:spcPts val="300"/>
-              </a:spcBef>
+              <a:t> — 6 · 9 · </a:t>
+            </a:r>
+            <a:pPr algn="l" indent="0" marL="0">
+              <a:lnSpc>
+                <a:spcPts val="1620"/>
+              </a:lnSpc>
+              <a:spcAft>
+                <a:spcPts val="300"/>
+              </a:spcAft>
+              <a:buNone/>
+            </a:pPr>
+            <a:r>
+              <a:rPr lang="en-US" sz="1200" b="1" dirty="0">
+                <a:solidFill>
+                  <a:srgbClr val="2C2C2C"/>
+                </a:solidFill>
+                <a:latin typeface="Verdana" pitchFamily="34" charset="0"/>
+                <a:ea typeface="Verdana" pitchFamily="34" charset="-122"/>
+                <a:cs typeface="Verdana" pitchFamily="34" charset="-120"/>
+              </a:rPr>
+              <a:t>96</a:t>
+            </a:r>
+            <a:endParaRPr lang="en-US" sz="1200" dirty="0"/>
+          </a:p>
+          <a:p>
+            <a:pPr algn="l" marL="342900" indent="-342900">
+              <a:lnSpc>
+                <a:spcPts val="1620"/>
+              </a:lnSpc>
+              <a:spcAft>
+                <a:spcPts val="300"/>
+              </a:spcAft>
+              <a:buSzPct val="100000"/>
+              <a:buChar char="•"/>
+            </a:pPr>
+            <a:r>
+              <a:rPr lang="en-US" sz="1200" b="1" dirty="0">
+                <a:solidFill>
+                  <a:srgbClr val="2C2C2C"/>
+                </a:solidFill>
+                <a:latin typeface="Verdana" pitchFamily="34" charset="0"/>
+                <a:ea typeface="Verdana" pitchFamily="34" charset="-122"/>
+                <a:cs typeface="Verdana" pitchFamily="34" charset="-120"/>
+              </a:rPr>
+              <a:t>100 − 8</a:t>
+            </a:r>
+            <a:pPr algn="l" indent="0" marL="0">
+              <a:lnSpc>
+                <a:spcPts val="1620"/>
+              </a:lnSpc>
               <a:spcAft>
                 <a:spcPts val="300"/>
               </a:spcAft>
@@ -4946,15 +5732,56 @@
                 <a:ea typeface="Verdana" pitchFamily="34" charset="-122"/>
                 <a:cs typeface="Verdana" pitchFamily="34" charset="-120"/>
               </a:rPr>
-              <a:t>100 − 4, 100 − 9, 100 − 6, 100 − 2, 100 − 5, 100 − 8, 100 − 3, 100 − 7, 100 − 1, 100 − 0</a:t>
-            </a:r>
-            <a:pPr algn="l" indent="0" marL="0">
-              <a:lnSpc>
-                <a:spcPts val="1680"/>
-              </a:lnSpc>
-              <a:spcBef>
-                <a:spcPts val="300"/>
-              </a:spcBef>
+              <a:t> — 2 · 9 · </a:t>
+            </a:r>
+            <a:pPr algn="l" indent="0" marL="0">
+              <a:lnSpc>
+                <a:spcPts val="1620"/>
+              </a:lnSpc>
+              <a:spcAft>
+                <a:spcPts val="300"/>
+              </a:spcAft>
+              <a:buNone/>
+            </a:pPr>
+            <a:r>
+              <a:rPr lang="en-US" sz="1200" b="1" dirty="0">
+                <a:solidFill>
+                  <a:srgbClr val="2C2C2C"/>
+                </a:solidFill>
+                <a:latin typeface="Verdana" pitchFamily="34" charset="0"/>
+                <a:ea typeface="Verdana" pitchFamily="34" charset="-122"/>
+                <a:cs typeface="Verdana" pitchFamily="34" charset="-120"/>
+              </a:rPr>
+              <a:t>92</a:t>
+            </a:r>
+            <a:endParaRPr lang="en-US" sz="1200" dirty="0"/>
+          </a:p>
+          <a:p>
+            <a:pPr algn="l" marL="342900" indent="-342900">
+              <a:lnSpc>
+                <a:spcPts val="1620"/>
+              </a:lnSpc>
+              <a:spcAft>
+                <a:spcPts val="300"/>
+              </a:spcAft>
+              <a:buSzPct val="100000"/>
+              <a:buChar char="•"/>
+            </a:pPr>
+            <a:r>
+              <a:rPr lang="en-US" sz="1200" b="1" dirty="0">
+                <a:solidFill>
+                  <a:srgbClr val="2C2C2C"/>
+                </a:solidFill>
+                <a:latin typeface="Verdana" pitchFamily="34" charset="0"/>
+                <a:ea typeface="Verdana" pitchFamily="34" charset="-122"/>
+                <a:cs typeface="Verdana" pitchFamily="34" charset="-120"/>
+              </a:rPr>
+              <a:t>100 − 1</a:t>
+            </a:r>
+            <a:pPr algn="l" indent="0" marL="0">
+              <a:lnSpc>
+                <a:spcPts val="1620"/>
+              </a:lnSpc>
               <a:spcAft>
                 <a:spcPts val="300"/>
               </a:spcAft>
@@ -4969,7 +5796,91 @@
                 <a:ea typeface="Verdana" pitchFamily="34" charset="-122"/>
                 <a:cs typeface="Verdana" pitchFamily="34" charset="-120"/>
               </a:rPr>
-              <a:t>. Aim for under 30 seconds.</a:t>
+              <a:t> — 9 · 9 · </a:t>
+            </a:r>
+            <a:pPr algn="l" indent="0" marL="0">
+              <a:lnSpc>
+                <a:spcPts val="1620"/>
+              </a:lnSpc>
+              <a:spcAft>
+                <a:spcPts val="300"/>
+              </a:spcAft>
+              <a:buNone/>
+            </a:pPr>
+            <a:r>
+              <a:rPr lang="en-US" sz="1200" b="1" dirty="0">
+                <a:solidFill>
+                  <a:srgbClr val="2C2C2C"/>
+                </a:solidFill>
+                <a:latin typeface="Verdana" pitchFamily="34" charset="0"/>
+                <a:ea typeface="Verdana" pitchFamily="34" charset="-122"/>
+                <a:cs typeface="Verdana" pitchFamily="34" charset="-120"/>
+              </a:rPr>
+              <a:t>99</a:t>
+            </a:r>
+            <a:endParaRPr lang="en-US" sz="1200" dirty="0"/>
+          </a:p>
+          <a:p>
+            <a:pPr algn="l" marL="342900" indent="-342900">
+              <a:lnSpc>
+                <a:spcPts val="1620"/>
+              </a:lnSpc>
+              <a:spcAft>
+                <a:spcPts val="300"/>
+              </a:spcAft>
+              <a:buSzPct val="100000"/>
+              <a:buChar char="•"/>
+            </a:pPr>
+            <a:r>
+              <a:rPr lang="en-US" sz="1200" b="1" dirty="0">
+                <a:solidFill>
+                  <a:srgbClr val="2C2C2C"/>
+                </a:solidFill>
+                <a:latin typeface="Verdana" pitchFamily="34" charset="0"/>
+                <a:ea typeface="Verdana" pitchFamily="34" charset="-122"/>
+                <a:cs typeface="Verdana" pitchFamily="34" charset="-120"/>
+              </a:rPr>
+              <a:t>100 − 9</a:t>
+            </a:r>
+            <a:pPr algn="l" indent="0" marL="0">
+              <a:lnSpc>
+                <a:spcPts val="1620"/>
+              </a:lnSpc>
+              <a:spcAft>
+                <a:spcPts val="300"/>
+              </a:spcAft>
+              <a:buNone/>
+            </a:pPr>
+            <a:r>
+              <a:rPr lang="en-US" sz="1200" dirty="0">
+                <a:solidFill>
+                  <a:srgbClr val="2C2C2C"/>
+                </a:solidFill>
+                <a:latin typeface="Verdana" pitchFamily="34" charset="0"/>
+                <a:ea typeface="Verdana" pitchFamily="34" charset="-122"/>
+                <a:cs typeface="Verdana" pitchFamily="34" charset="-120"/>
+              </a:rPr>
+              <a:t> — 1 · 9 · </a:t>
+            </a:r>
+            <a:pPr algn="l" indent="0" marL="0">
+              <a:lnSpc>
+                <a:spcPts val="1620"/>
+              </a:lnSpc>
+              <a:spcAft>
+                <a:spcPts val="300"/>
+              </a:spcAft>
+              <a:buNone/>
+            </a:pPr>
+            <a:r>
+              <a:rPr lang="en-US" sz="1200" b="1" dirty="0">
+                <a:solidFill>
+                  <a:srgbClr val="2C2C2C"/>
+                </a:solidFill>
+                <a:latin typeface="Verdana" pitchFamily="34" charset="0"/>
+                <a:ea typeface="Verdana" pitchFamily="34" charset="-122"/>
+                <a:cs typeface="Verdana" pitchFamily="34" charset="-120"/>
+              </a:rPr>
+              <a:t>91</a:t>
             </a:r>
             <a:endParaRPr lang="en-US" sz="1200" dirty="0"/>
           </a:p>
@@ -5127,7 +6038,7 @@
                 <a:ea typeface="Georgia" pitchFamily="34" charset="-122"/>
                 <a:cs typeface="Georgia" pitchFamily="34" charset="-120"/>
               </a:rPr>
-              <a:t>Differentiation</a:t>
+              <a:t>Activity: bar-model worksheet (15 min)</a:t>
             </a:r>
             <a:endParaRPr lang="en-US" sz="1800" dirty="0"/>
           </a:p>
@@ -5141,8 +6052,8 @@
         </p:nvSpPr>
         <p:spPr>
           <a:xfrm>
-            <a:off x="634901" y="883593"/>
-            <a:ext cx="8102798" cy="554236"/>
+            <a:off x="406301" y="870942"/>
+            <a:ext cx="8498026" cy="213271"/>
           </a:xfrm>
           <a:prstGeom prst="rect">
             <a:avLst/>
@@ -5154,31 +6065,13 @@
           <a:bodyPr wrap="square" lIns="0" tIns="0" rIns="0" bIns="0" rtlCol="0" anchor="t"/>
           <a:lstStyle/>
           <a:p>
-            <a:pPr algn="l" marL="342900" indent="-342900">
-              <a:lnSpc>
-                <a:spcPts val="1620"/>
-              </a:lnSpc>
-              <a:spcAft>
-                <a:spcPts val="300"/>
-              </a:spcAft>
-              <a:buSzPct val="100000"/>
-              <a:buChar char="•"/>
-            </a:pPr>
-            <a:r>
-              <a:rPr lang="en-US" sz="1200" b="1" dirty="0">
-                <a:solidFill>
-                  <a:srgbClr val="2C2C2C"/>
-                </a:solidFill>
-                <a:latin typeface="Verdana" pitchFamily="34" charset="0"/>
-                <a:ea typeface="Verdana" pitchFamily="34" charset="-122"/>
-                <a:cs typeface="Verdana" pitchFamily="34" charset="-120"/>
-              </a:rPr>
-              <a:t>Tier up:</a:t>
-            </a:r>
-            <a:pPr algn="l" indent="0" marL="0">
-              <a:lnSpc>
-                <a:spcPts val="1620"/>
-              </a:lnSpc>
+            <a:pPr algn="l" indent="0" marL="0">
+              <a:lnSpc>
+                <a:spcPts val="1680"/>
+              </a:lnSpc>
+              <a:spcBef>
+                <a:spcPts val="300"/>
+              </a:spcBef>
               <a:spcAft>
                 <a:spcPts val="300"/>
               </a:spcAft>
@@ -5193,179 +6086,320 @@
                 <a:ea typeface="Verdana" pitchFamily="34" charset="-122"/>
                 <a:cs typeface="Verdana" pitchFamily="34" charset="-120"/>
               </a:rPr>
-              <a:t> Try </a:t>
-            </a:r>
-            <a:pPr algn="l" indent="0" marL="0">
-              <a:lnSpc>
-                <a:spcPts val="1620"/>
-              </a:lnSpc>
-              <a:spcAft>
-                <a:spcPts val="300"/>
-              </a:spcAft>
-              <a:buNone/>
-            </a:pPr>
-            <a:r>
-              <a:rPr lang="en-US" sz="1200" dirty="0">
-                <a:solidFill>
-                  <a:srgbClr val="2C2C2C"/>
-                </a:solidFill>
-                <a:latin typeface="Verdana" pitchFamily="34" charset="0"/>
-                <a:ea typeface="Verdana" pitchFamily="34" charset="-122"/>
-                <a:cs typeface="Verdana" pitchFamily="34" charset="-120"/>
-              </a:rPr>
-              <a:t>100 − 10</a:t>
-            </a:r>
-            <a:pPr algn="l" indent="0" marL="0">
-              <a:lnSpc>
-                <a:spcPts val="1620"/>
-              </a:lnSpc>
-              <a:spcAft>
-                <a:spcPts val="300"/>
-              </a:spcAft>
-              <a:buNone/>
-            </a:pPr>
-            <a:r>
-              <a:rPr lang="en-US" sz="1200" dirty="0">
-                <a:solidFill>
-                  <a:srgbClr val="2C2C2C"/>
-                </a:solidFill>
-                <a:latin typeface="Verdana" pitchFamily="34" charset="0"/>
-                <a:ea typeface="Verdana" pitchFamily="34" charset="-122"/>
-                <a:cs typeface="Verdana" pitchFamily="34" charset="-120"/>
-              </a:rPr>
-              <a:t>, </a:t>
-            </a:r>
-            <a:pPr algn="l" indent="0" marL="0">
-              <a:lnSpc>
-                <a:spcPts val="1620"/>
-              </a:lnSpc>
-              <a:spcAft>
-                <a:spcPts val="300"/>
-              </a:spcAft>
-              <a:buNone/>
-            </a:pPr>
-            <a:r>
-              <a:rPr lang="en-US" sz="1200" dirty="0">
-                <a:solidFill>
-                  <a:srgbClr val="2C2C2C"/>
-                </a:solidFill>
-                <a:latin typeface="Verdana" pitchFamily="34" charset="0"/>
-                <a:ea typeface="Verdana" pitchFamily="34" charset="-122"/>
-                <a:cs typeface="Verdana" pitchFamily="34" charset="-120"/>
-              </a:rPr>
-              <a:t>100 − 15</a:t>
-            </a:r>
-            <a:pPr algn="l" indent="0" marL="0">
-              <a:lnSpc>
-                <a:spcPts val="1620"/>
-              </a:lnSpc>
-              <a:spcAft>
-                <a:spcPts val="300"/>
-              </a:spcAft>
-              <a:buNone/>
-            </a:pPr>
-            <a:r>
-              <a:rPr lang="en-US" sz="1200" dirty="0">
-                <a:solidFill>
-                  <a:srgbClr val="2C2C2C"/>
-                </a:solidFill>
-                <a:latin typeface="Verdana" pitchFamily="34" charset="0"/>
-                <a:ea typeface="Verdana" pitchFamily="34" charset="-122"/>
-                <a:cs typeface="Verdana" pitchFamily="34" charset="-120"/>
-              </a:rPr>
-              <a:t>, </a:t>
-            </a:r>
-            <a:pPr algn="l" indent="0" marL="0">
-              <a:lnSpc>
-                <a:spcPts val="1620"/>
-              </a:lnSpc>
-              <a:spcAft>
-                <a:spcPts val="300"/>
-              </a:spcAft>
-              <a:buNone/>
-            </a:pPr>
-            <a:r>
-              <a:rPr lang="en-US" sz="1200" dirty="0">
-                <a:solidFill>
-                  <a:srgbClr val="2C2C2C"/>
-                </a:solidFill>
-                <a:latin typeface="Verdana" pitchFamily="34" charset="0"/>
-                <a:ea typeface="Verdana" pitchFamily="34" charset="-122"/>
-                <a:cs typeface="Verdana" pitchFamily="34" charset="-120"/>
-              </a:rPr>
-              <a:t>100 − 20</a:t>
-            </a:r>
-            <a:pPr algn="l" indent="0" marL="0">
-              <a:lnSpc>
-                <a:spcPts val="1620"/>
-              </a:lnSpc>
-              <a:spcAft>
-                <a:spcPts val="300"/>
-              </a:spcAft>
-              <a:buNone/>
-            </a:pPr>
-            <a:r>
-              <a:rPr lang="en-US" sz="1200" dirty="0">
-                <a:solidFill>
-                  <a:srgbClr val="2C2C2C"/>
-                </a:solidFill>
-                <a:latin typeface="Verdana" pitchFamily="34" charset="0"/>
-                <a:ea typeface="Verdana" pitchFamily="34" charset="-122"/>
-                <a:cs typeface="Verdana" pitchFamily="34" charset="-120"/>
-              </a:rPr>
-              <a:t>. Bar model still works.</a:t>
+              <a:t>Each child gets a printed worksheet with 6 bar-model problems:</a:t>
             </a:r>
             <a:endParaRPr lang="en-US" sz="1200" dirty="0"/>
           </a:p>
-          <a:p>
-            <a:pPr algn="l" marL="342900" indent="-342900">
-              <a:lnSpc>
-                <a:spcPts val="1620"/>
-              </a:lnSpc>
-              <a:spcAft>
-                <a:spcPts val="300"/>
-              </a:spcAft>
-              <a:buSzPct val="100000"/>
-              <a:buChar char="•"/>
-            </a:pPr>
-            <a:r>
-              <a:rPr lang="en-US" sz="1200" b="1" dirty="0">
-                <a:solidFill>
-                  <a:srgbClr val="2C2C2C"/>
-                </a:solidFill>
-                <a:latin typeface="Verdana" pitchFamily="34" charset="0"/>
-                <a:ea typeface="Verdana" pitchFamily="34" charset="-122"/>
-                <a:cs typeface="Verdana" pitchFamily="34" charset="-120"/>
-              </a:rPr>
-              <a:t>Tier down:</a:t>
-            </a:r>
-            <a:pPr algn="l" indent="0" marL="0">
-              <a:lnSpc>
-                <a:spcPts val="1620"/>
-              </a:lnSpc>
-              <a:spcAft>
-                <a:spcPts val="300"/>
-              </a:spcAft>
-              <a:buNone/>
-            </a:pPr>
-            <a:r>
-              <a:rPr lang="en-US" sz="1200" dirty="0">
-                <a:solidFill>
-                  <a:srgbClr val="2C2C2C"/>
-                </a:solidFill>
-                <a:latin typeface="Verdana" pitchFamily="34" charset="0"/>
-                <a:ea typeface="Verdana" pitchFamily="34" charset="-122"/>
-                <a:cs typeface="Verdana" pitchFamily="34" charset="-120"/>
-              </a:rPr>
-              <a:t> Use only N from 1 to 5. Build up.</a:t>
-            </a:r>
-            <a:endParaRPr lang="en-US" sz="1200" dirty="0"/>
-          </a:p>
         </p:txBody>
       </p:sp>
       <p:sp>
         <p:nvSpPr>
           <p:cNvPr id="5" name="Text 3"/>
+          <p:cNvSpPr/>
+          <p:nvPr/>
+        </p:nvSpPr>
+        <p:spPr>
+          <a:xfrm>
+            <a:off x="406301" y="1173063"/>
+            <a:ext cx="8331398" cy="1301353"/>
+          </a:xfrm>
+          <a:prstGeom prst="rect">
+            <a:avLst/>
+          </a:prstGeom>
+          <a:solidFill>
+            <a:srgbClr val="FFFFFF"/>
+          </a:solidFill>
+          <a:ln/>
+        </p:spPr>
+        <p:txBody>
+          <a:bodyPr wrap="square" rtlCol="0" anchor="ctr"/>
+          <a:lstStyle/>
+          <a:p>
+            <a:pPr indent="0" marL="0">
+              <a:buNone/>
+            </a:pPr>
+            <a:endParaRPr lang="en-US" dirty="0"/>
+          </a:p>
+        </p:txBody>
+      </p:sp>
+      <p:sp>
+        <p:nvSpPr>
+          <p:cNvPr id="6" name="Shape 4"/>
+          <p:cNvSpPr/>
+          <p:nvPr/>
+        </p:nvSpPr>
+        <p:spPr>
+          <a:xfrm>
+            <a:off x="430113" y="1173063"/>
+            <a:ext cx="0" cy="1301353"/>
+          </a:xfrm>
+          <a:prstGeom prst="line">
+            <a:avLst/>
+          </a:prstGeom>
+          <a:noFill/>
+          <a:ln w="47625">
+            <a:solidFill>
+              <a:srgbClr val="87A96B"/>
+            </a:solidFill>
+            <a:prstDash val="solid"/>
+          </a:ln>
+        </p:spPr>
+      </p:sp>
+      <p:sp>
+        <p:nvSpPr>
+          <p:cNvPr id="7" name="Text 5"/>
+          <p:cNvSpPr/>
+          <p:nvPr/>
+        </p:nvSpPr>
+        <p:spPr>
+          <a:xfrm>
+            <a:off x="631627" y="1300014"/>
+            <a:ext cx="8086939" cy="174575"/>
+          </a:xfrm>
+          <a:prstGeom prst="rect">
+            <a:avLst/>
+          </a:prstGeom>
+          <a:noFill/>
+          <a:ln/>
+        </p:spPr>
+        <p:txBody>
+          <a:bodyPr wrap="square" lIns="0" tIns="0" rIns="0" bIns="0" rtlCol="0" anchor="t"/>
+          <a:lstStyle/>
+          <a:p>
+            <a:pPr algn="l" indent="0" marL="0">
+              <a:lnSpc>
+                <a:spcPts val="1375"/>
+              </a:lnSpc>
+              <a:buNone/>
+            </a:pPr>
+            <a:r>
+              <a:rPr lang="en-US" sz="1100" dirty="0">
+                <a:solidFill>
+                  <a:srgbClr val="2C2C2C"/>
+                </a:solidFill>
+                <a:latin typeface="Courier New" pitchFamily="34" charset="0"/>
+                <a:ea typeface="Courier New" pitchFamily="34" charset="-122"/>
+                <a:cs typeface="Courier New" pitchFamily="34" charset="-120"/>
+              </a:rPr>
+              <a:t>100 − 3 = ?</a:t>
+            </a:r>
+            <a:endParaRPr lang="en-US" sz="1100" dirty="0"/>
+          </a:p>
+        </p:txBody>
+      </p:sp>
+      <p:sp>
+        <p:nvSpPr>
+          <p:cNvPr id="8" name="Text 6"/>
+          <p:cNvSpPr/>
+          <p:nvPr/>
+        </p:nvSpPr>
+        <p:spPr>
+          <a:xfrm>
+            <a:off x="631627" y="1474589"/>
+            <a:ext cx="8086939" cy="174575"/>
+          </a:xfrm>
+          <a:prstGeom prst="rect">
+            <a:avLst/>
+          </a:prstGeom>
+          <a:noFill/>
+          <a:ln/>
+        </p:spPr>
+        <p:txBody>
+          <a:bodyPr wrap="square" lIns="0" tIns="0" rIns="0" bIns="0" rtlCol="0" anchor="t"/>
+          <a:lstStyle/>
+          <a:p>
+            <a:pPr algn="l" indent="0" marL="0">
+              <a:lnSpc>
+                <a:spcPts val="1375"/>
+              </a:lnSpc>
+              <a:buNone/>
+            </a:pPr>
+            <a:r>
+              <a:rPr lang="en-US" sz="1100" dirty="0">
+                <a:solidFill>
+                  <a:srgbClr val="2C2C2C"/>
+                </a:solidFill>
+                <a:latin typeface="Courier New" pitchFamily="34" charset="0"/>
+                <a:ea typeface="Courier New" pitchFamily="34" charset="-122"/>
+                <a:cs typeface="Courier New" pitchFamily="34" charset="-120"/>
+              </a:rPr>
+              <a:t>100 − 5 = ?</a:t>
+            </a:r>
+            <a:endParaRPr lang="en-US" sz="1100" dirty="0"/>
+          </a:p>
+        </p:txBody>
+      </p:sp>
+      <p:sp>
+        <p:nvSpPr>
+          <p:cNvPr id="9" name="Text 7"/>
+          <p:cNvSpPr/>
+          <p:nvPr/>
+        </p:nvSpPr>
+        <p:spPr>
+          <a:xfrm>
+            <a:off x="631627" y="1649164"/>
+            <a:ext cx="8086939" cy="174575"/>
+          </a:xfrm>
+          <a:prstGeom prst="rect">
+            <a:avLst/>
+          </a:prstGeom>
+          <a:noFill/>
+          <a:ln/>
+        </p:spPr>
+        <p:txBody>
+          <a:bodyPr wrap="square" lIns="0" tIns="0" rIns="0" bIns="0" rtlCol="0" anchor="t"/>
+          <a:lstStyle/>
+          <a:p>
+            <a:pPr algn="l" indent="0" marL="0">
+              <a:lnSpc>
+                <a:spcPts val="1375"/>
+              </a:lnSpc>
+              <a:buNone/>
+            </a:pPr>
+            <a:r>
+              <a:rPr lang="en-US" sz="1100" dirty="0">
+                <a:solidFill>
+                  <a:srgbClr val="2C2C2C"/>
+                </a:solidFill>
+                <a:latin typeface="Courier New" pitchFamily="34" charset="0"/>
+                <a:ea typeface="Courier New" pitchFamily="34" charset="-122"/>
+                <a:cs typeface="Courier New" pitchFamily="34" charset="-120"/>
+              </a:rPr>
+              <a:t>100 − 6 = ?</a:t>
+            </a:r>
+            <a:endParaRPr lang="en-US" sz="1100" dirty="0"/>
+          </a:p>
+        </p:txBody>
+      </p:sp>
+      <p:sp>
+        <p:nvSpPr>
+          <p:cNvPr id="10" name="Text 8"/>
+          <p:cNvSpPr/>
+          <p:nvPr/>
+        </p:nvSpPr>
+        <p:spPr>
+          <a:xfrm>
+            <a:off x="631627" y="1823740"/>
+            <a:ext cx="8086939" cy="174575"/>
+          </a:xfrm>
+          <a:prstGeom prst="rect">
+            <a:avLst/>
+          </a:prstGeom>
+          <a:noFill/>
+          <a:ln/>
+        </p:spPr>
+        <p:txBody>
+          <a:bodyPr wrap="square" lIns="0" tIns="0" rIns="0" bIns="0" rtlCol="0" anchor="t"/>
+          <a:lstStyle/>
+          <a:p>
+            <a:pPr algn="l" indent="0" marL="0">
+              <a:lnSpc>
+                <a:spcPts val="1375"/>
+              </a:lnSpc>
+              <a:buNone/>
+            </a:pPr>
+            <a:r>
+              <a:rPr lang="en-US" sz="1100" dirty="0">
+                <a:solidFill>
+                  <a:srgbClr val="2C2C2C"/>
+                </a:solidFill>
+                <a:latin typeface="Courier New" pitchFamily="34" charset="0"/>
+                <a:ea typeface="Courier New" pitchFamily="34" charset="-122"/>
+                <a:cs typeface="Courier New" pitchFamily="34" charset="-120"/>
+              </a:rPr>
+              <a:t>100 − 2 = ?</a:t>
+            </a:r>
+            <a:endParaRPr lang="en-US" sz="1100" dirty="0"/>
+          </a:p>
+        </p:txBody>
+      </p:sp>
+      <p:sp>
+        <p:nvSpPr>
+          <p:cNvPr id="11" name="Text 9"/>
+          <p:cNvSpPr/>
+          <p:nvPr/>
+        </p:nvSpPr>
+        <p:spPr>
+          <a:xfrm>
+            <a:off x="631627" y="1998315"/>
+            <a:ext cx="8086939" cy="174575"/>
+          </a:xfrm>
+          <a:prstGeom prst="rect">
+            <a:avLst/>
+          </a:prstGeom>
+          <a:noFill/>
+          <a:ln/>
+        </p:spPr>
+        <p:txBody>
+          <a:bodyPr wrap="square" lIns="0" tIns="0" rIns="0" bIns="0" rtlCol="0" anchor="t"/>
+          <a:lstStyle/>
+          <a:p>
+            <a:pPr algn="l" indent="0" marL="0">
+              <a:lnSpc>
+                <a:spcPts val="1375"/>
+              </a:lnSpc>
+              <a:buNone/>
+            </a:pPr>
+            <a:r>
+              <a:rPr lang="en-US" sz="1100" dirty="0">
+                <a:solidFill>
+                  <a:srgbClr val="2C2C2C"/>
+                </a:solidFill>
+                <a:latin typeface="Courier New" pitchFamily="34" charset="0"/>
+                <a:ea typeface="Courier New" pitchFamily="34" charset="-122"/>
+                <a:cs typeface="Courier New" pitchFamily="34" charset="-120"/>
+              </a:rPr>
+              <a:t>100 − 8 = ?</a:t>
+            </a:r>
+            <a:endParaRPr lang="en-US" sz="1100" dirty="0"/>
+          </a:p>
+        </p:txBody>
+      </p:sp>
+      <p:sp>
+        <p:nvSpPr>
+          <p:cNvPr id="12" name="Text 10"/>
+          <p:cNvSpPr/>
+          <p:nvPr/>
+        </p:nvSpPr>
+        <p:spPr>
+          <a:xfrm>
+            <a:off x="631627" y="2172891"/>
+            <a:ext cx="8086939" cy="174575"/>
+          </a:xfrm>
+          <a:prstGeom prst="rect">
+            <a:avLst/>
+          </a:prstGeom>
+          <a:noFill/>
+          <a:ln/>
+        </p:spPr>
+        <p:txBody>
+          <a:bodyPr wrap="square" lIns="0" tIns="0" rIns="0" bIns="0" rtlCol="0" anchor="t"/>
+          <a:lstStyle/>
+          <a:p>
+            <a:pPr algn="l" indent="0" marL="0">
+              <a:lnSpc>
+                <a:spcPts val="1375"/>
+              </a:lnSpc>
+              <a:buNone/>
+            </a:pPr>
+            <a:r>
+              <a:rPr lang="en-US" sz="1100" dirty="0">
+                <a:solidFill>
+                  <a:srgbClr val="2C2C2C"/>
+                </a:solidFill>
+                <a:latin typeface="Courier New" pitchFamily="34" charset="0"/>
+                <a:ea typeface="Courier New" pitchFamily="34" charset="-122"/>
+                <a:cs typeface="Courier New" pitchFamily="34" charset="-120"/>
+              </a:rPr>
+              <a:t>100 − 7 = ?</a:t>
+            </a:r>
+            <a:endParaRPr lang="en-US" sz="1100" dirty="0"/>
+          </a:p>
+        </p:txBody>
+      </p:sp>
+      <p:sp>
+        <p:nvSpPr>
+          <p:cNvPr id="13" name="Text 11"/>
           <p:cNvSpPr/>
           <p:nvPr/>
         </p:nvSpPr>
